--- a/presentations/b05-devices/B05_Devices_Narrated.pptx
+++ b/presentations/b05-devices/B05_Devices_Narrated.pptx
@@ -117,26 +117,26 @@
   <p:extLst>
     <p:ext uri="{521415D9-36F7-43E2-AB2F-B90AF26B5E84}">
       <p14:sectionLst xmlns:p14="http://schemas.microsoft.com/office/powerpoint/2010/main">
-        <p14:section name="Why Group Policy" id="{442189C1-451D-0521-583B-5EBBD9A2E980}">
+        <p14:section name="Why Group Policy" id="{E15FD82F-5080-8BAC-E7E5-41428F0BE542}">
           <p14:sldIdLst>
             <p14:sldId id="256"/>
             <p14:sldId id="257"/>
             <p14:sldId id="258"/>
           </p14:sldIdLst>
         </p14:section>
-        <p14:section name="What replaces it" id="{3843678C-8E6F-EFB4-C565-014B272EEDB4}">
+        <p14:section name="What replaces it" id="{FD55E4D2-5101-BA43-2ECD-A543B10D8E8D}">
           <p14:sldIdLst>
             <p14:sldId id="259"/>
             <p14:sldId id="260"/>
             <p14:sldId id="261"/>
           </p14:sldIdLst>
         </p14:section>
-        <p14:section name="Who owns it" id="{6F236550-07D9-6D17-FFC7-496FD70DE620}">
+        <p14:section name="Who owns it" id="{4BE41E7D-F600-EFC9-E80A-85713D869F44}">
           <p14:sldIdLst>
             <p14:sldId id="262"/>
           </p14:sldIdLst>
         </p14:section>
-        <p14:section name="How to do it" id="{89BEA83D-B49D-07BD-3476-A4FD3F5B036D}">
+        <p14:section name="How to do it" id="{705ADBEF-6657-E232-85B8-64D69FFF1ECA}">
           <p14:sldIdLst>
             <p14:sldId id="263"/>
             <p14:sldId id="264"/>
@@ -144,7 +144,7 @@
             <p14:sldId id="266"/>
           </p14:sldIdLst>
         </p14:section>
-        <p14:section name="Backup" id="{5904257D-9132-800D-DEF1-8F9129E061CA}">
+        <p14:section name="Backup" id="{0E63DA1B-EF40-62C3-4C30-57300953BEC3}">
           <p14:sldIdLst/>
         </p14:section>
       </p14:sectionLst>
@@ -181,7 +181,7 @@
     </p:spTree>
     <p:extLst>
       <p:ext uri="{BB962C8B-B14F-4D97-AF65-F5344CB8AC3E}">
-        <p14:creationId xmlns:p14="http://schemas.microsoft.com/office/powerpoint/2010/main" val="3434064973"/>
+        <p14:creationId xmlns:p14="http://schemas.microsoft.com/office/powerpoint/2010/main" val="4227438426"/>
       </p:ext>
     </p:extLst>
   </p:cSld>
@@ -327,7 +327,7 @@
           <a:p>
             <a:r>
               <a:rPr lang="en-US" dirty="0"/>
-              <a:t>[0:00–0:27]  This briefing comes from Book 05 of the Modernization Workbook, Devices and Endpoints: the move from Group Policy to Intune for devices, and to Azure Arc for servers.
+              <a:t>[0:00–0:27]  This briefing comes from Book 05 of the Federal Modernization Workbook, Devices and Endpoints: the move from Group Policy to Intune for devices, and to Azure Arc for servers.
 I'll take it through four questions: why Group Policy can't simply be carried to the cloud, what replaces it, who owns the endpoint, and how to migrate a fleet without losing the governance Group Policy quietly provided.
 The short version: this is not a settings migration. It's a governance rebuild.
 Workbook: Book 05, index.</a:t>
@@ -1542,7 +1542,7 @@
                   <a:schemeClr val="accent5"/>
                 </a:solidFill>
               </a:rPr>
-              <a:t>Modernization Workbook  ·  Book 05 Devices &amp; Endpoints</a:t>
+              <a:t>Federal Modernization Workbook  ·  Book 05 Devices &amp; Endpoints</a:t>
             </a:r>
             <a:endParaRPr lang="en-US" sz="1000" dirty="0"/>
           </a:p>
@@ -2032,7 +2032,87 @@
       </p:sp>
       <p:sp>
         <p:nvSpPr>
-          <p:cNvPr id="4" name="Agenda line"/>
+          <p:cNvPr id="4" name="Presenter"/>
+          <p:cNvSpPr txBox="1"/>
+          <p:nvPr/>
+        </p:nvSpPr>
+        <p:spPr>
+          <a:xfrm>
+            <a:off x="731520" y="5897880"/>
+            <a:ext cx="6858000" cy="365760"/>
+          </a:xfrm>
+          <a:prstGeom prst="rect">
+            <a:avLst/>
+          </a:prstGeom>
+          <a:noFill/>
+          <a:ln/>
+        </p:spPr>
+        <p:txBody>
+          <a:bodyPr wrap="square" lIns="0" tIns="0" rIns="0" bIns="0" rtlCol="0" anchor="ctr"/>
+          <a:lstStyle/>
+          <a:p>
+            <a:pPr marL="0" indent="0">
+              <a:buNone/>
+            </a:pPr>
+            <a:r>
+              <a:rPr lang="en-US" sz="1600" dirty="0">
+                <a:solidFill>
+                  <a:srgbClr val="64748B"/>
+                </a:solidFill>
+              </a:rPr>
+              <a:t>Presented by  </a:t>
+            </a:r>
+            <a:r>
+              <a:rPr lang="en-US" sz="1600" b="1" dirty="0">
+                <a:solidFill>
+                  <a:srgbClr val="1F2A44"/>
+                </a:solidFill>
+              </a:rPr>
+              <a:t>Michael F. Stratton</a:t>
+            </a:r>
+            <a:endParaRPr lang="en-US" sz="1600" dirty="0"/>
+          </a:p>
+        </p:txBody>
+      </p:sp>
+      <p:sp>
+        <p:nvSpPr>
+          <p:cNvPr id="5" name="Disclaimer"/>
+          <p:cNvSpPr txBox="1"/>
+          <p:nvPr/>
+        </p:nvSpPr>
+        <p:spPr>
+          <a:xfrm>
+            <a:off x="731520" y="6309360"/>
+            <a:ext cx="8686800" cy="274320"/>
+          </a:xfrm>
+          <a:prstGeom prst="rect">
+            <a:avLst/>
+          </a:prstGeom>
+          <a:noFill/>
+          <a:ln/>
+        </p:spPr>
+        <p:txBody>
+          <a:bodyPr wrap="square" lIns="0" tIns="0" rIns="0" bIns="0" rtlCol="0" anchor="ctr"/>
+          <a:lstStyle/>
+          <a:p>
+            <a:pPr marL="0" indent="0">
+              <a:buNone/>
+            </a:pPr>
+            <a:r>
+              <a:rPr lang="en-US" sz="1050" dirty="0">
+                <a:solidFill>
+                  <a:srgbClr val="64748B"/>
+                </a:solidFill>
+              </a:rPr>
+              <a:t>Not an official U.S. government publication. Independent technical analysis; not reviewed or endorsed by any federal agency.</a:t>
+            </a:r>
+            <a:endParaRPr lang="en-US" sz="1050" dirty="0"/>
+          </a:p>
+        </p:txBody>
+      </p:sp>
+      <p:sp>
+        <p:nvSpPr>
+          <p:cNvPr id="6" name="Agenda line"/>
           <p:cNvSpPr txBox="1"/>
           <p:nvPr/>
         </p:nvSpPr>
@@ -2116,7 +2196,7 @@
       </p:sp>
       <p:sp>
         <p:nvSpPr>
-          <p:cNvPr id="5" name="Series line"/>
+          <p:cNvPr id="7" name="Series line"/>
           <p:cNvSpPr txBox="1"/>
           <p:nvPr/>
         </p:nvSpPr>
@@ -2144,7 +2224,7 @@
                   <a:srgbClr val="1F2A44"/>
                 </a:solidFill>
               </a:rPr>
-              <a:t>Modernization Workbook</a:t>
+              <a:t>Federal Modernization Workbook</a:t>
             </a:r>
             <a:endParaRPr lang="en-US" sz="1600" dirty="0"/>
           </a:p>
@@ -2166,11 +2246,11 @@
       </p:sp>
       <p:pic>
         <p:nvPicPr>
-          <p:cNvPr id="6" name="Narration">
+          <p:cNvPr id="8" name="Narration" descr="Narration for this slide; captions available">
             <a:hlinkClick r:id="" action="ppaction://media"/>
             <a:extLst>
               <a:ext uri="{FF2B5EF4-FFF2-40B4-BE49-F238E27FC236}">
-                <a16:creationId xmlns:a16="http://schemas.microsoft.com/office/drawing/2014/main" id="{01B2F357-D403-9DCA-8286-01C807B9BB33}"/>
+                <a16:creationId xmlns:a16="http://schemas.microsoft.com/office/drawing/2014/main" id="{5F37BC30-A6F3-2766-79EF-264453F83A7B}"/>
               </a:ext>
             </a:extLst>
           </p:cNvPr>
@@ -2181,7 +2261,17 @@
             <a:audioFile r:link="rId2"/>
             <p:extLst>
               <p:ext uri="{DAA4B4D4-6D71-4841-9C94-3DE7FCFB9230}">
-                <p14:media xmlns:p14="http://schemas.microsoft.com/office/powerpoint/2010/main" r:embed="rId1"/>
+                <p14:media xmlns:p14="http://schemas.microsoft.com/office/powerpoint/2010/main" r:embed="rId1">
+                  <p14:extLst>
+                    <p:ext uri="{3AFAAA56-56D3-431D-BCD4-E75A35582382}">
+                      <p173:tracksInfo xmlns:p173="http://schemas.microsoft.com/office/powerpoint/2017/3/main" displayLoc="slide">
+                        <p173:trackLst>
+                          <p173:track id="{96D1C4DE-86C3-4452-BA94-417A07B8A310}" label="English (captions)" lang="en-US" r:embed="rId6"/>
+                        </p173:trackLst>
+                      </p173:tracksInfo>
+                    </p:ext>
+                  </p14:extLst>
+                </p14:media>
               </p:ext>
             </p:extLst>
           </p:nvPr>
@@ -2209,10 +2299,10 @@
   </p:clrMapOvr>
   <mc:AlternateContent xmlns:mc="http://schemas.openxmlformats.org/markup-compatibility/2006">
     <mc:Choice xmlns:p14="http://schemas.microsoft.com/office/powerpoint/2010/main" Requires="p14">
-      <p:transition spd="slow" p14:dur="2000" advTm="28550"/>
+      <p:transition spd="slow" p14:dur="2000" advTm="28840"/>
     </mc:Choice>
     <mc:Fallback>
-      <p:transition spd="slow" advTm="28550"/>
+      <p:transition spd="slow" advTm="28840"/>
     </mc:Fallback>
   </mc:AlternateContent>
   <p:timing>
@@ -2246,9 +2336,9 @@
                                   <p:childTnLst>
                                     <p:cmd type="call" cmd="playFrom(0.0)">
                                       <p:cBhvr>
-                                        <p:cTn id="6" dur="27552" fill="hold"/>
+                                        <p:cTn id="6" dur="27840" fill="hold"/>
                                         <p:tgtEl>
-                                          <p:spTgt spid="6"/>
+                                          <p:spTgt spid="8"/>
                                         </p:tgtEl>
                                       </p:cBhvr>
                                     </p:cmd>
@@ -2348,7 +2438,13 @@
       </p:sp>
       <p:sp>
         <p:nvSpPr>
-          <p:cNvPr id="3" name="Tag How"/>
+          <p:cNvPr id="3" name="Tag How">
+            <a:extLst>
+              <a:ext uri="{C183D7F6-B498-43B3-948B-1728B52AA6E4}">
+                <adec:decorative xmlns:adec="http://schemas.microsoft.com/office/drawing/2017/decorative" val="1"/>
+              </a:ext>
+            </a:extLst>
+          </p:cNvPr>
           <p:cNvSpPr/>
           <p:nvPr/>
         </p:nvSpPr>
@@ -2411,7 +2507,13 @@
       </p:sp>
       <p:sp>
         <p:nvSpPr>
-          <p:cNvPr id="5" name="Icon FaServer"/>
+          <p:cNvPr id="5" name="Icon FaServer">
+            <a:extLst>
+              <a:ext uri="{C183D7F6-B498-43B3-948B-1728B52AA6E4}">
+                <adec:decorative xmlns:adec="http://schemas.microsoft.com/office/drawing/2017/decorative" val="1"/>
+              </a:ext>
+            </a:extLst>
+          </p:cNvPr>
           <p:cNvSpPr/>
           <p:nvPr/>
         </p:nvSpPr>
@@ -2436,7 +2538,13 @@
       </p:sp>
       <p:pic>
         <p:nvPicPr>
-          <p:cNvPr id="6" name="Image 0" descr="C:\Users\whale\git\mwb-b05\presentations\_build\icons\FaServer.png"/>
+          <p:cNvPr id="6" name="Image 0">
+            <a:extLst>
+              <a:ext uri="{C183D7F6-B498-43B3-948B-1728B52AA6E4}">
+                <adec:decorative xmlns:adec="http://schemas.microsoft.com/office/drawing/2017/decorative" val="1"/>
+              </a:ext>
+            </a:extLst>
+          </p:cNvPr>
           <p:cNvPicPr>
             <a:picLocks noChangeAspect="1"/>
           </p:cNvPicPr>
@@ -2510,7 +2618,13 @@
       </p:sp>
       <p:sp>
         <p:nvSpPr>
-          <p:cNvPr id="8" name="Icon FaListCheck"/>
+          <p:cNvPr id="8" name="Icon FaListCheck">
+            <a:extLst>
+              <a:ext uri="{C183D7F6-B498-43B3-948B-1728B52AA6E4}">
+                <adec:decorative xmlns:adec="http://schemas.microsoft.com/office/drawing/2017/decorative" val="1"/>
+              </a:ext>
+            </a:extLst>
+          </p:cNvPr>
           <p:cNvSpPr/>
           <p:nvPr/>
         </p:nvSpPr>
@@ -2535,7 +2649,13 @@
       </p:sp>
       <p:pic>
         <p:nvPicPr>
-          <p:cNvPr id="9" name="Image 1" descr="C:\Users\whale\git\mwb-b05\presentations\_build\icons\FaListCheck.png"/>
+          <p:cNvPr id="9" name="Image 1">
+            <a:extLst>
+              <a:ext uri="{C183D7F6-B498-43B3-948B-1728B52AA6E4}">
+                <adec:decorative xmlns:adec="http://schemas.microsoft.com/office/drawing/2017/decorative" val="1"/>
+              </a:ext>
+            </a:extLst>
+          </p:cNvPr>
           <p:cNvPicPr>
             <a:picLocks noChangeAspect="1"/>
           </p:cNvPicPr>
@@ -2609,7 +2729,13 @@
       </p:sp>
       <p:sp>
         <p:nvSpPr>
-          <p:cNvPr id="11" name="Icon FaShieldHalved"/>
+          <p:cNvPr id="11" name="Icon FaShieldHalved">
+            <a:extLst>
+              <a:ext uri="{C183D7F6-B498-43B3-948B-1728B52AA6E4}">
+                <adec:decorative xmlns:adec="http://schemas.microsoft.com/office/drawing/2017/decorative" val="1"/>
+              </a:ext>
+            </a:extLst>
+          </p:cNvPr>
           <p:cNvSpPr/>
           <p:nvPr/>
         </p:nvSpPr>
@@ -2634,7 +2760,13 @@
       </p:sp>
       <p:pic>
         <p:nvPicPr>
-          <p:cNvPr id="12" name="Image 2" descr="C:\Users\whale\git\mwb-b05\presentations\_build\icons\FaShieldHalved.png"/>
+          <p:cNvPr id="12" name="Image 2">
+            <a:extLst>
+              <a:ext uri="{C183D7F6-B498-43B3-948B-1728B52AA6E4}">
+                <adec:decorative xmlns:adec="http://schemas.microsoft.com/office/drawing/2017/decorative" val="1"/>
+              </a:ext>
+            </a:extLst>
+          </p:cNvPr>
           <p:cNvPicPr>
             <a:picLocks noChangeAspect="1"/>
           </p:cNvPicPr>
@@ -2708,7 +2840,13 @@
       </p:sp>
       <p:sp>
         <p:nvSpPr>
-          <p:cNvPr id="14" name="Date 0"/>
+          <p:cNvPr id="14" name="Date 0">
+            <a:extLst>
+              <a:ext uri="{C183D7F6-B498-43B3-948B-1728B52AA6E4}">
+                <adec:decorative xmlns:adec="http://schemas.microsoft.com/office/drawing/2017/decorative" val="1"/>
+              </a:ext>
+            </a:extLst>
+          </p:cNvPr>
           <p:cNvSpPr/>
           <p:nvPr/>
         </p:nvSpPr>
@@ -2795,7 +2933,13 @@
       </p:sp>
       <p:sp>
         <p:nvSpPr>
-          <p:cNvPr id="16" name="Date 1"/>
+          <p:cNvPr id="16" name="Date 1">
+            <a:extLst>
+              <a:ext uri="{C183D7F6-B498-43B3-948B-1728B52AA6E4}">
+                <adec:decorative xmlns:adec="http://schemas.microsoft.com/office/drawing/2017/decorative" val="1"/>
+              </a:ext>
+            </a:extLst>
+          </p:cNvPr>
           <p:cNvSpPr/>
           <p:nvPr/>
         </p:nvSpPr>
@@ -2882,7 +3026,13 @@
       </p:sp>
       <p:sp>
         <p:nvSpPr>
-          <p:cNvPr id="18" name="Rollback"/>
+          <p:cNvPr id="18" name="Rollback">
+            <a:extLst>
+              <a:ext uri="{C183D7F6-B498-43B3-948B-1728B52AA6E4}">
+                <adec:decorative xmlns:adec="http://schemas.microsoft.com/office/drawing/2017/decorative" val="1"/>
+              </a:ext>
+            </a:extLst>
+          </p:cNvPr>
           <p:cNvSpPr/>
           <p:nvPr/>
         </p:nvSpPr>
@@ -2916,7 +3066,13 @@
       </p:sp>
       <p:sp>
         <p:nvSpPr>
-          <p:cNvPr id="19" name="Icon FaArrowsRotate"/>
+          <p:cNvPr id="19" name="Icon FaArrowsRotate">
+            <a:extLst>
+              <a:ext uri="{C183D7F6-B498-43B3-948B-1728B52AA6E4}">
+                <adec:decorative xmlns:adec="http://schemas.microsoft.com/office/drawing/2017/decorative" val="1"/>
+              </a:ext>
+            </a:extLst>
+          </p:cNvPr>
           <p:cNvSpPr/>
           <p:nvPr/>
         </p:nvSpPr>
@@ -2941,7 +3097,13 @@
       </p:sp>
       <p:pic>
         <p:nvPicPr>
-          <p:cNvPr id="20" name="Image 3" descr="C:\Users\whale\git\mwb-b05\presentations\_build\icons\FaArrowsRotate.png"/>
+          <p:cNvPr id="20" name="Image 3">
+            <a:extLst>
+              <a:ext uri="{C183D7F6-B498-43B3-948B-1728B52AA6E4}">
+                <adec:decorative xmlns:adec="http://schemas.microsoft.com/office/drawing/2017/decorative" val="1"/>
+              </a:ext>
+            </a:extLst>
+          </p:cNvPr>
           <p:cNvPicPr>
             <a:picLocks noChangeAspect="1"/>
           </p:cNvPicPr>
@@ -3090,11 +3252,11 @@
       </p:sp>
       <p:pic>
         <p:nvPicPr>
-          <p:cNvPr id="23" name="Narration">
+          <p:cNvPr id="23" name="Narration" descr="Narration for this slide; captions available">
             <a:hlinkClick r:id="" action="ppaction://media"/>
             <a:extLst>
               <a:ext uri="{FF2B5EF4-FFF2-40B4-BE49-F238E27FC236}">
-                <a16:creationId xmlns:a16="http://schemas.microsoft.com/office/drawing/2014/main" id="{352CF637-9670-8DFF-AEE6-DDDF34F58BF5}"/>
+                <a16:creationId xmlns:a16="http://schemas.microsoft.com/office/drawing/2014/main" id="{5CD9B4D5-D9F5-3F41-B535-B6BECAC781B6}"/>
               </a:ext>
             </a:extLst>
           </p:cNvPr>
@@ -3105,7 +3267,17 @@
             <a:audioFile r:link="rId2"/>
             <p:extLst>
               <p:ext uri="{DAA4B4D4-6D71-4841-9C94-3DE7FCFB9230}">
-                <p14:media xmlns:p14="http://schemas.microsoft.com/office/powerpoint/2010/main" r:embed="rId1"/>
+                <p14:media xmlns:p14="http://schemas.microsoft.com/office/powerpoint/2010/main" r:embed="rId1">
+                  <p14:extLst>
+                    <p:ext uri="{3AFAAA56-56D3-431D-BCD4-E75A35582382}">
+                      <p173:tracksInfo xmlns:p173="http://schemas.microsoft.com/office/powerpoint/2017/3/main" displayLoc="slide">
+                        <p173:trackLst>
+                          <p173:track id="{8099743E-C6CF-4A79-B6D1-8B8E9438B183}" label="English (captions)" lang="en-US" r:embed="rId10"/>
+                        </p173:trackLst>
+                      </p173:tracksInfo>
+                    </p:ext>
+                  </p14:extLst>
+                </p14:media>
               </p:ext>
             </p:extLst>
           </p:nvPr>
@@ -3272,7 +3444,13 @@
       </p:sp>
       <p:sp>
         <p:nvSpPr>
-          <p:cNvPr id="3" name="Tag How"/>
+          <p:cNvPr id="3" name="Tag How">
+            <a:extLst>
+              <a:ext uri="{C183D7F6-B498-43B3-948B-1728B52AA6E4}">
+                <adec:decorative xmlns:adec="http://schemas.microsoft.com/office/drawing/2017/decorative" val="1"/>
+              </a:ext>
+            </a:extLst>
+          </p:cNvPr>
           <p:cNvSpPr/>
           <p:nvPr/>
         </p:nvSpPr>
@@ -3483,7 +3661,13 @@
       </p:sp>
       <p:sp>
         <p:nvSpPr>
-          <p:cNvPr id="7" name="Ask box"/>
+          <p:cNvPr id="7" name="Ask box">
+            <a:extLst>
+              <a:ext uri="{C183D7F6-B498-43B3-948B-1728B52AA6E4}">
+                <adec:decorative xmlns:adec="http://schemas.microsoft.com/office/drawing/2017/decorative" val="1"/>
+              </a:ext>
+            </a:extLst>
+          </p:cNvPr>
           <p:cNvSpPr/>
           <p:nvPr/>
         </p:nvSpPr>
@@ -3517,7 +3701,13 @@
       </p:sp>
       <p:sp>
         <p:nvSpPr>
-          <p:cNvPr id="8" name="Icon FaUserCheck"/>
+          <p:cNvPr id="8" name="Icon FaUserCheck">
+            <a:extLst>
+              <a:ext uri="{C183D7F6-B498-43B3-948B-1728B52AA6E4}">
+                <adec:decorative xmlns:adec="http://schemas.microsoft.com/office/drawing/2017/decorative" val="1"/>
+              </a:ext>
+            </a:extLst>
+          </p:cNvPr>
           <p:cNvSpPr/>
           <p:nvPr/>
         </p:nvSpPr>
@@ -3542,7 +3732,13 @@
       </p:sp>
       <p:pic>
         <p:nvPicPr>
-          <p:cNvPr id="9" name="Image 0" descr="C:\Users\whale\git\mwb-b05\presentations\_build\icons\FaUserCheck.png"/>
+          <p:cNvPr id="9" name="Image 0">
+            <a:extLst>
+              <a:ext uri="{C183D7F6-B498-43B3-948B-1728B52AA6E4}">
+                <adec:decorative xmlns:adec="http://schemas.microsoft.com/office/drawing/2017/decorative" val="1"/>
+              </a:ext>
+            </a:extLst>
+          </p:cNvPr>
           <p:cNvPicPr>
             <a:picLocks noChangeAspect="1"/>
           </p:cNvPicPr>
@@ -3699,7 +3895,13 @@
       </p:sp>
       <p:sp>
         <p:nvSpPr>
-          <p:cNvPr id="12" name="Next"/>
+          <p:cNvPr id="12" name="Next">
+            <a:extLst>
+              <a:ext uri="{C183D7F6-B498-43B3-948B-1728B52AA6E4}">
+                <adec:decorative xmlns:adec="http://schemas.microsoft.com/office/drawing/2017/decorative" val="1"/>
+              </a:ext>
+            </a:extLst>
+          </p:cNvPr>
           <p:cNvSpPr/>
           <p:nvPr/>
         </p:nvSpPr>
@@ -3733,7 +3935,13 @@
       </p:sp>
       <p:sp>
         <p:nvSpPr>
-          <p:cNvPr id="13" name="Icon FaBook"/>
+          <p:cNvPr id="13" name="Icon FaBook">
+            <a:extLst>
+              <a:ext uri="{C183D7F6-B498-43B3-948B-1728B52AA6E4}">
+                <adec:decorative xmlns:adec="http://schemas.microsoft.com/office/drawing/2017/decorative" val="1"/>
+              </a:ext>
+            </a:extLst>
+          </p:cNvPr>
           <p:cNvSpPr/>
           <p:nvPr/>
         </p:nvSpPr>
@@ -3758,7 +3966,13 @@
       </p:sp>
       <p:pic>
         <p:nvPicPr>
-          <p:cNvPr id="14" name="Image 1" descr="C:\Users\whale\git\mwb-b05\presentations\_build\icons\FaBook.png"/>
+          <p:cNvPr id="14" name="Image 1">
+            <a:extLst>
+              <a:ext uri="{C183D7F6-B498-43B3-948B-1728B52AA6E4}">
+                <adec:decorative xmlns:adec="http://schemas.microsoft.com/office/drawing/2017/decorative" val="1"/>
+              </a:ext>
+            </a:extLst>
+          </p:cNvPr>
           <p:cNvPicPr>
             <a:picLocks noChangeAspect="1"/>
           </p:cNvPicPr>
@@ -3871,11 +4085,11 @@
       </p:sp>
       <p:pic>
         <p:nvPicPr>
-          <p:cNvPr id="16" name="Narration">
+          <p:cNvPr id="16" name="Narration" descr="Narration for this slide; captions available">
             <a:hlinkClick r:id="" action="ppaction://media"/>
             <a:extLst>
               <a:ext uri="{FF2B5EF4-FFF2-40B4-BE49-F238E27FC236}">
-                <a16:creationId xmlns:a16="http://schemas.microsoft.com/office/drawing/2014/main" id="{23CAE784-D1BA-B487-BC30-FE506FABABD5}"/>
+                <a16:creationId xmlns:a16="http://schemas.microsoft.com/office/drawing/2014/main" id="{13038B7C-FB4B-5050-332F-FE34C2B98C79}"/>
               </a:ext>
             </a:extLst>
           </p:cNvPr>
@@ -3886,7 +4100,17 @@
             <a:audioFile r:link="rId2"/>
             <p:extLst>
               <p:ext uri="{DAA4B4D4-6D71-4841-9C94-3DE7FCFB9230}">
-                <p14:media xmlns:p14="http://schemas.microsoft.com/office/powerpoint/2010/main" r:embed="rId1"/>
+                <p14:media xmlns:p14="http://schemas.microsoft.com/office/powerpoint/2010/main" r:embed="rId1">
+                  <p14:extLst>
+                    <p:ext uri="{3AFAAA56-56D3-431D-BCD4-E75A35582382}">
+                      <p173:tracksInfo xmlns:p173="http://schemas.microsoft.com/office/powerpoint/2017/3/main" displayLoc="slide">
+                        <p173:trackLst>
+                          <p173:track id="{2916D8B4-5472-41F2-8A4A-8F2E63C3E241}" label="English (captions)" lang="en-US" r:embed="rId8"/>
+                        </p173:trackLst>
+                      </p173:tracksInfo>
+                    </p:ext>
+                  </p14:extLst>
+                </p14:media>
               </p:ext>
             </p:extLst>
           </p:nvPr>
@@ -4053,7 +4277,13 @@
       </p:sp>
       <p:sp>
         <p:nvSpPr>
-          <p:cNvPr id="3" name="Tag Why"/>
+          <p:cNvPr id="3" name="Tag Why">
+            <a:extLst>
+              <a:ext uri="{C183D7F6-B498-43B3-948B-1728B52AA6E4}">
+                <adec:decorative xmlns:adec="http://schemas.microsoft.com/office/drawing/2017/decorative" val="1"/>
+              </a:ext>
+            </a:extLst>
+          </p:cNvPr>
           <p:cNvSpPr/>
           <p:nvPr/>
         </p:nvSpPr>
@@ -4152,7 +4382,13 @@
       </p:sp>
       <p:sp>
         <p:nvSpPr>
-          <p:cNvPr id="6" name="Job 0"/>
+          <p:cNvPr id="6" name="Job 0">
+            <a:extLst>
+              <a:ext uri="{C183D7F6-B498-43B3-948B-1728B52AA6E4}">
+                <adec:decorative xmlns:adec="http://schemas.microsoft.com/office/drawing/2017/decorative" val="1"/>
+              </a:ext>
+            </a:extLst>
+          </p:cNvPr>
           <p:cNvSpPr/>
           <p:nvPr/>
         </p:nvSpPr>
@@ -4230,7 +4466,13 @@
       </p:sp>
       <p:sp>
         <p:nvSpPr>
-          <p:cNvPr id="8" name="Job 1"/>
+          <p:cNvPr id="8" name="Job 1">
+            <a:extLst>
+              <a:ext uri="{C183D7F6-B498-43B3-948B-1728B52AA6E4}">
+                <adec:decorative xmlns:adec="http://schemas.microsoft.com/office/drawing/2017/decorative" val="1"/>
+              </a:ext>
+            </a:extLst>
+          </p:cNvPr>
           <p:cNvSpPr/>
           <p:nvPr/>
         </p:nvSpPr>
@@ -4308,7 +4550,13 @@
       </p:sp>
       <p:sp>
         <p:nvSpPr>
-          <p:cNvPr id="10" name="Job 2"/>
+          <p:cNvPr id="10" name="Job 2">
+            <a:extLst>
+              <a:ext uri="{C183D7F6-B498-43B3-948B-1728B52AA6E4}">
+                <adec:decorative xmlns:adec="http://schemas.microsoft.com/office/drawing/2017/decorative" val="1"/>
+              </a:ext>
+            </a:extLst>
+          </p:cNvPr>
           <p:cNvSpPr/>
           <p:nvPr/>
         </p:nvSpPr>
@@ -4386,7 +4634,13 @@
       </p:sp>
       <p:sp>
         <p:nvSpPr>
-          <p:cNvPr id="12" name="Job 3"/>
+          <p:cNvPr id="12" name="Job 3">
+            <a:extLst>
+              <a:ext uri="{C183D7F6-B498-43B3-948B-1728B52AA6E4}">
+                <adec:decorative xmlns:adec="http://schemas.microsoft.com/office/drawing/2017/decorative" val="1"/>
+              </a:ext>
+            </a:extLst>
+          </p:cNvPr>
           <p:cNvSpPr/>
           <p:nvPr/>
         </p:nvSpPr>
@@ -4464,7 +4718,13 @@
       </p:sp>
       <p:sp>
         <p:nvSpPr>
-          <p:cNvPr id="14" name="Job 4"/>
+          <p:cNvPr id="14" name="Job 4">
+            <a:extLst>
+              <a:ext uri="{C183D7F6-B498-43B3-948B-1728B52AA6E4}">
+                <adec:decorative xmlns:adec="http://schemas.microsoft.com/office/drawing/2017/decorative" val="1"/>
+              </a:ext>
+            </a:extLst>
+          </p:cNvPr>
           <p:cNvSpPr/>
           <p:nvPr/>
         </p:nvSpPr>
@@ -4542,7 +4802,13 @@
       </p:sp>
       <p:sp>
         <p:nvSpPr>
-          <p:cNvPr id="16" name="Intune box"/>
+          <p:cNvPr id="16" name="Intune box">
+            <a:extLst>
+              <a:ext uri="{C183D7F6-B498-43B3-948B-1728B52AA6E4}">
+                <adec:decorative xmlns:adec="http://schemas.microsoft.com/office/drawing/2017/decorative" val="1"/>
+              </a:ext>
+            </a:extLst>
+          </p:cNvPr>
           <p:cNvSpPr/>
           <p:nvPr/>
         </p:nvSpPr>
@@ -4576,7 +4842,13 @@
       </p:sp>
       <p:sp>
         <p:nvSpPr>
-          <p:cNvPr id="17" name="Icon FaLaptop"/>
+          <p:cNvPr id="17" name="Icon FaLaptop">
+            <a:extLst>
+              <a:ext uri="{C183D7F6-B498-43B3-948B-1728B52AA6E4}">
+                <adec:decorative xmlns:adec="http://schemas.microsoft.com/office/drawing/2017/decorative" val="1"/>
+              </a:ext>
+            </a:extLst>
+          </p:cNvPr>
           <p:cNvSpPr/>
           <p:nvPr/>
         </p:nvSpPr>
@@ -4601,7 +4873,13 @@
       </p:sp>
       <p:pic>
         <p:nvPicPr>
-          <p:cNvPr id="18" name="Image 0" descr="C:\Users\whale\git\mwb-b05\presentations\_build\icons\FaLaptop.png"/>
+          <p:cNvPr id="18" name="Image 0">
+            <a:extLst>
+              <a:ext uri="{C183D7F6-B498-43B3-948B-1728B52AA6E4}">
+                <adec:decorative xmlns:adec="http://schemas.microsoft.com/office/drawing/2017/decorative" val="1"/>
+              </a:ext>
+            </a:extLst>
+          </p:cNvPr>
           <p:cNvPicPr>
             <a:picLocks noChangeAspect="1"/>
           </p:cNvPicPr>
@@ -4772,7 +5050,13 @@
       </p:sp>
       <p:sp>
         <p:nvSpPr>
-          <p:cNvPr id="21" name="Not a migration"/>
+          <p:cNvPr id="21" name="Not a migration">
+            <a:extLst>
+              <a:ext uri="{C183D7F6-B498-43B3-948B-1728B52AA6E4}">
+                <adec:decorative xmlns:adec="http://schemas.microsoft.com/office/drawing/2017/decorative" val="1"/>
+              </a:ext>
+            </a:extLst>
+          </p:cNvPr>
           <p:cNvSpPr/>
           <p:nvPr/>
         </p:nvSpPr>
@@ -4806,7 +5090,13 @@
       </p:sp>
       <p:sp>
         <p:nvSpPr>
-          <p:cNvPr id="22" name="Icon FaTriangleExclamation"/>
+          <p:cNvPr id="22" name="Icon FaTriangleExclamation">
+            <a:extLst>
+              <a:ext uri="{C183D7F6-B498-43B3-948B-1728B52AA6E4}">
+                <adec:decorative xmlns:adec="http://schemas.microsoft.com/office/drawing/2017/decorative" val="1"/>
+              </a:ext>
+            </a:extLst>
+          </p:cNvPr>
           <p:cNvSpPr/>
           <p:nvPr/>
         </p:nvSpPr>
@@ -4831,7 +5121,13 @@
       </p:sp>
       <p:pic>
         <p:nvPicPr>
-          <p:cNvPr id="23" name="Image 1" descr="C:\Users\whale\git\mwb-b05\presentations\_build\icons\FaTriangleExclamation.png"/>
+          <p:cNvPr id="23" name="Image 1">
+            <a:extLst>
+              <a:ext uri="{C183D7F6-B498-43B3-948B-1728B52AA6E4}">
+                <adec:decorative xmlns:adec="http://schemas.microsoft.com/office/drawing/2017/decorative" val="1"/>
+              </a:ext>
+            </a:extLst>
+          </p:cNvPr>
           <p:cNvPicPr>
             <a:picLocks noChangeAspect="1"/>
           </p:cNvPicPr>
@@ -4980,11 +5276,11 @@
       </p:sp>
       <p:pic>
         <p:nvPicPr>
-          <p:cNvPr id="27" name="Narration">
+          <p:cNvPr id="27" name="Narration" descr="Narration for this slide; captions available">
             <a:hlinkClick r:id="" action="ppaction://media"/>
             <a:extLst>
               <a:ext uri="{FF2B5EF4-FFF2-40B4-BE49-F238E27FC236}">
-                <a16:creationId xmlns:a16="http://schemas.microsoft.com/office/drawing/2014/main" id="{4B78F37E-C8BC-E5D2-E823-4F2941A28C96}"/>
+                <a16:creationId xmlns:a16="http://schemas.microsoft.com/office/drawing/2014/main" id="{940BD238-E247-415E-DAD3-9BAC464873FD}"/>
               </a:ext>
             </a:extLst>
           </p:cNvPr>
@@ -4995,7 +5291,17 @@
             <a:audioFile r:link="rId2"/>
             <p:extLst>
               <p:ext uri="{DAA4B4D4-6D71-4841-9C94-3DE7FCFB9230}">
-                <p14:media xmlns:p14="http://schemas.microsoft.com/office/powerpoint/2010/main" r:embed="rId1"/>
+                <p14:media xmlns:p14="http://schemas.microsoft.com/office/powerpoint/2010/main" r:embed="rId1">
+                  <p14:extLst>
+                    <p:ext uri="{3AFAAA56-56D3-431D-BCD4-E75A35582382}">
+                      <p173:tracksInfo xmlns:p173="http://schemas.microsoft.com/office/powerpoint/2017/3/main" displayLoc="slide">
+                        <p173:trackLst>
+                          <p173:track id="{ED7C3FC3-30A4-469F-87A8-8A6984D6139C}" label="English (captions)" lang="en-US" r:embed="rId8"/>
+                        </p173:trackLst>
+                      </p173:tracksInfo>
+                    </p:ext>
+                  </p14:extLst>
+                </p14:media>
               </p:ext>
             </p:extLst>
           </p:nvPr>
@@ -5162,7 +5468,13 @@
       </p:sp>
       <p:sp>
         <p:nvSpPr>
-          <p:cNvPr id="3" name="Tag Why"/>
+          <p:cNvPr id="3" name="Tag Why">
+            <a:extLst>
+              <a:ext uri="{C183D7F6-B498-43B3-948B-1728B52AA6E4}">
+                <adec:decorative xmlns:adec="http://schemas.microsoft.com/office/drawing/2017/decorative" val="1"/>
+              </a:ext>
+            </a:extLst>
+          </p:cNvPr>
           <p:cNvSpPr/>
           <p:nvPr/>
         </p:nvSpPr>
@@ -5244,7 +5556,7 @@
         <a:graphic>
           <a:graphicData uri="http://schemas.openxmlformats.org/drawingml/2006/table">
             <a:tbl>
-              <a:tblPr/>
+              <a:tblPr firstRow="1" bandRow="1"/>
               <a:tblGrid>
                 <a:gridCol w="3291840">
                   <a:extLst>
@@ -5839,7 +6151,13 @@
       </p:graphicFrame>
       <p:sp>
         <p:nvSpPr>
-          <p:cNvPr id="6" name="Switch box"/>
+          <p:cNvPr id="6" name="Switch box">
+            <a:extLst>
+              <a:ext uri="{C183D7F6-B498-43B3-948B-1728B52AA6E4}">
+                <adec:decorative xmlns:adec="http://schemas.microsoft.com/office/drawing/2017/decorative" val="1"/>
+              </a:ext>
+            </a:extLst>
+          </p:cNvPr>
           <p:cNvSpPr/>
           <p:nvPr/>
         </p:nvSpPr>
@@ -5873,7 +6191,13 @@
       </p:sp>
       <p:sp>
         <p:nvSpPr>
-          <p:cNvPr id="7" name="Icon FaArrowsRotate"/>
+          <p:cNvPr id="7" name="Icon FaArrowsRotate">
+            <a:extLst>
+              <a:ext uri="{C183D7F6-B498-43B3-948B-1728B52AA6E4}">
+                <adec:decorative xmlns:adec="http://schemas.microsoft.com/office/drawing/2017/decorative" val="1"/>
+              </a:ext>
+            </a:extLst>
+          </p:cNvPr>
           <p:cNvSpPr/>
           <p:nvPr/>
         </p:nvSpPr>
@@ -5898,7 +6222,13 @@
       </p:sp>
       <p:pic>
         <p:nvPicPr>
-          <p:cNvPr id="8" name="Image 0" descr="C:\Users\whale\git\mwb-b05\presentations\_build\icons\FaArrowsRotate.png"/>
+          <p:cNvPr id="8" name="Image 0">
+            <a:extLst>
+              <a:ext uri="{C183D7F6-B498-43B3-948B-1728B52AA6E4}">
+                <adec:decorative xmlns:adec="http://schemas.microsoft.com/office/drawing/2017/decorative" val="1"/>
+              </a:ext>
+            </a:extLst>
+          </p:cNvPr>
           <p:cNvPicPr>
             <a:picLocks noChangeAspect="1"/>
           </p:cNvPicPr>
@@ -6037,7 +6367,13 @@
       </p:sp>
       <p:sp>
         <p:nvSpPr>
-          <p:cNvPr id="11" name="Governed"/>
+          <p:cNvPr id="11" name="Governed">
+            <a:extLst>
+              <a:ext uri="{C183D7F6-B498-43B3-948B-1728B52AA6E4}">
+                <adec:decorative xmlns:adec="http://schemas.microsoft.com/office/drawing/2017/decorative" val="1"/>
+              </a:ext>
+            </a:extLst>
+          </p:cNvPr>
           <p:cNvSpPr/>
           <p:nvPr/>
         </p:nvSpPr>
@@ -6071,7 +6407,13 @@
       </p:sp>
       <p:sp>
         <p:nvSpPr>
-          <p:cNvPr id="12" name="Icon FaRoute"/>
+          <p:cNvPr id="12" name="Icon FaRoute">
+            <a:extLst>
+              <a:ext uri="{C183D7F6-B498-43B3-948B-1728B52AA6E4}">
+                <adec:decorative xmlns:adec="http://schemas.microsoft.com/office/drawing/2017/decorative" val="1"/>
+              </a:ext>
+            </a:extLst>
+          </p:cNvPr>
           <p:cNvSpPr/>
           <p:nvPr/>
         </p:nvSpPr>
@@ -6096,7 +6438,13 @@
       </p:sp>
       <p:pic>
         <p:nvPicPr>
-          <p:cNvPr id="13" name="Image 1" descr="C:\Users\whale\git\mwb-b05\presentations\_build\icons\FaRoute.png"/>
+          <p:cNvPr id="13" name="Image 1">
+            <a:extLst>
+              <a:ext uri="{C183D7F6-B498-43B3-948B-1728B52AA6E4}">
+                <adec:decorative xmlns:adec="http://schemas.microsoft.com/office/drawing/2017/decorative" val="1"/>
+              </a:ext>
+            </a:extLst>
+          </p:cNvPr>
           <p:cNvPicPr>
             <a:picLocks noChangeAspect="1"/>
           </p:cNvPicPr>
@@ -6245,11 +6593,11 @@
       </p:sp>
       <p:pic>
         <p:nvPicPr>
-          <p:cNvPr id="16" name="Narration">
+          <p:cNvPr id="16" name="Narration" descr="Narration for this slide; captions available">
             <a:hlinkClick r:id="" action="ppaction://media"/>
             <a:extLst>
               <a:ext uri="{FF2B5EF4-FFF2-40B4-BE49-F238E27FC236}">
-                <a16:creationId xmlns:a16="http://schemas.microsoft.com/office/drawing/2014/main" id="{41B84903-38F1-2B39-8B3A-A33352292AB6}"/>
+                <a16:creationId xmlns:a16="http://schemas.microsoft.com/office/drawing/2014/main" id="{E2994411-054E-0222-BAAB-D1141C4D92DA}"/>
               </a:ext>
             </a:extLst>
           </p:cNvPr>
@@ -6260,7 +6608,17 @@
             <a:audioFile r:link="rId2"/>
             <p:extLst>
               <p:ext uri="{DAA4B4D4-6D71-4841-9C94-3DE7FCFB9230}">
-                <p14:media xmlns:p14="http://schemas.microsoft.com/office/powerpoint/2010/main" r:embed="rId1"/>
+                <p14:media xmlns:p14="http://schemas.microsoft.com/office/powerpoint/2010/main" r:embed="rId1">
+                  <p14:extLst>
+                    <p:ext uri="{3AFAAA56-56D3-431D-BCD4-E75A35582382}">
+                      <p173:tracksInfo xmlns:p173="http://schemas.microsoft.com/office/powerpoint/2017/3/main" displayLoc="slide">
+                        <p173:trackLst>
+                          <p173:track id="{BCCD64AA-A8B7-4017-8782-8C303A46A140}" label="English (captions)" lang="en-US" r:embed="rId8"/>
+                        </p173:trackLst>
+                      </p173:tracksInfo>
+                    </p:ext>
+                  </p14:extLst>
+                </p14:media>
               </p:ext>
             </p:extLst>
           </p:nvPr>
@@ -6427,7 +6785,13 @@
       </p:sp>
       <p:sp>
         <p:nvSpPr>
-          <p:cNvPr id="3" name="Tag What"/>
+          <p:cNvPr id="3" name="Tag What">
+            <a:extLst>
+              <a:ext uri="{C183D7F6-B498-43B3-948B-1728B52AA6E4}">
+                <adec:decorative xmlns:adec="http://schemas.microsoft.com/office/drawing/2017/decorative" val="1"/>
+              </a:ext>
+            </a:extLst>
+          </p:cNvPr>
           <p:cNvSpPr/>
           <p:nvPr/>
         </p:nvSpPr>
@@ -6490,7 +6854,13 @@
       </p:sp>
       <p:sp>
         <p:nvSpPr>
-          <p:cNvPr id="5" name="Road 0"/>
+          <p:cNvPr id="5" name="Road 0">
+            <a:extLst>
+              <a:ext uri="{C183D7F6-B498-43B3-948B-1728B52AA6E4}">
+                <adec:decorative xmlns:adec="http://schemas.microsoft.com/office/drawing/2017/decorative" val="1"/>
+              </a:ext>
+            </a:extLst>
+          </p:cNvPr>
           <p:cNvSpPr/>
           <p:nvPr/>
         </p:nvSpPr>
@@ -6524,7 +6894,13 @@
       </p:sp>
       <p:sp>
         <p:nvSpPr>
-          <p:cNvPr id="6" name="Icon FaLaptop"/>
+          <p:cNvPr id="6" name="Icon FaLaptop">
+            <a:extLst>
+              <a:ext uri="{C183D7F6-B498-43B3-948B-1728B52AA6E4}">
+                <adec:decorative xmlns:adec="http://schemas.microsoft.com/office/drawing/2017/decorative" val="1"/>
+              </a:ext>
+            </a:extLst>
+          </p:cNvPr>
           <p:cNvSpPr/>
           <p:nvPr/>
         </p:nvSpPr>
@@ -6549,7 +6925,13 @@
       </p:sp>
       <p:pic>
         <p:nvPicPr>
-          <p:cNvPr id="7" name="Image 0" descr="C:\Users\whale\git\mwb-b05\presentations\_build\icons\FaLaptop.png"/>
+          <p:cNvPr id="7" name="Image 0">
+            <a:extLst>
+              <a:ext uri="{C183D7F6-B498-43B3-948B-1728B52AA6E4}">
+                <adec:decorative xmlns:adec="http://schemas.microsoft.com/office/drawing/2017/decorative" val="1"/>
+              </a:ext>
+            </a:extLst>
+          </p:cNvPr>
           <p:cNvPicPr>
             <a:picLocks noChangeAspect="1"/>
           </p:cNvPicPr>
@@ -6706,7 +7088,13 @@
       </p:sp>
       <p:sp>
         <p:nvSpPr>
-          <p:cNvPr id="10" name="Road 1"/>
+          <p:cNvPr id="10" name="Road 1">
+            <a:extLst>
+              <a:ext uri="{C183D7F6-B498-43B3-948B-1728B52AA6E4}">
+                <adec:decorative xmlns:adec="http://schemas.microsoft.com/office/drawing/2017/decorative" val="1"/>
+              </a:ext>
+            </a:extLst>
+          </p:cNvPr>
           <p:cNvSpPr/>
           <p:nvPr/>
         </p:nvSpPr>
@@ -6740,7 +7128,13 @@
       </p:sp>
       <p:sp>
         <p:nvSpPr>
-          <p:cNvPr id="11" name="Icon FaServer"/>
+          <p:cNvPr id="11" name="Icon FaServer">
+            <a:extLst>
+              <a:ext uri="{C183D7F6-B498-43B3-948B-1728B52AA6E4}">
+                <adec:decorative xmlns:adec="http://schemas.microsoft.com/office/drawing/2017/decorative" val="1"/>
+              </a:ext>
+            </a:extLst>
+          </p:cNvPr>
           <p:cNvSpPr/>
           <p:nvPr/>
         </p:nvSpPr>
@@ -6765,7 +7159,13 @@
       </p:sp>
       <p:pic>
         <p:nvPicPr>
-          <p:cNvPr id="12" name="Image 1" descr="C:\Users\whale\git\mwb-b05\presentations\_build\icons\FaServer.png"/>
+          <p:cNvPr id="12" name="Image 1">
+            <a:extLst>
+              <a:ext uri="{C183D7F6-B498-43B3-948B-1728B52AA6E4}">
+                <adec:decorative xmlns:adec="http://schemas.microsoft.com/office/drawing/2017/decorative" val="1"/>
+              </a:ext>
+            </a:extLst>
+          </p:cNvPr>
           <p:cNvPicPr>
             <a:picLocks noChangeAspect="1"/>
           </p:cNvPicPr>
@@ -6922,7 +7322,13 @@
       </p:sp>
       <p:sp>
         <p:nvSpPr>
-          <p:cNvPr id="15" name="Onboard box"/>
+          <p:cNvPr id="15" name="Onboard box">
+            <a:extLst>
+              <a:ext uri="{C183D7F6-B498-43B3-948B-1728B52AA6E4}">
+                <adec:decorative xmlns:adec="http://schemas.microsoft.com/office/drawing/2017/decorative" val="1"/>
+              </a:ext>
+            </a:extLst>
+          </p:cNvPr>
           <p:cNvSpPr/>
           <p:nvPr/>
         </p:nvSpPr>
@@ -6956,7 +7362,13 @@
       </p:sp>
       <p:sp>
         <p:nvSpPr>
-          <p:cNvPr id="16" name="Icon FaDoorOpen"/>
+          <p:cNvPr id="16" name="Icon FaDoorOpen">
+            <a:extLst>
+              <a:ext uri="{C183D7F6-B498-43B3-948B-1728B52AA6E4}">
+                <adec:decorative xmlns:adec="http://schemas.microsoft.com/office/drawing/2017/decorative" val="1"/>
+              </a:ext>
+            </a:extLst>
+          </p:cNvPr>
           <p:cNvSpPr/>
           <p:nvPr/>
         </p:nvSpPr>
@@ -6981,7 +7393,13 @@
       </p:sp>
       <p:pic>
         <p:nvPicPr>
-          <p:cNvPr id="17" name="Image 2" descr="C:\Users\whale\git\mwb-b05\presentations\_build\icons\FaDoorOpen.png"/>
+          <p:cNvPr id="17" name="Image 2">
+            <a:extLst>
+              <a:ext uri="{C183D7F6-B498-43B3-948B-1728B52AA6E4}">
+                <adec:decorative xmlns:adec="http://schemas.microsoft.com/office/drawing/2017/decorative" val="1"/>
+              </a:ext>
+            </a:extLst>
+          </p:cNvPr>
           <p:cNvPicPr>
             <a:picLocks noChangeAspect="1"/>
           </p:cNvPicPr>
@@ -7080,7 +7498,13 @@
       </p:sp>
       <p:sp>
         <p:nvSpPr>
-          <p:cNvPr id="20" name="Correlate"/>
+          <p:cNvPr id="20" name="Correlate">
+            <a:extLst>
+              <a:ext uri="{C183D7F6-B498-43B3-948B-1728B52AA6E4}">
+                <adec:decorative xmlns:adec="http://schemas.microsoft.com/office/drawing/2017/decorative" val="1"/>
+              </a:ext>
+            </a:extLst>
+          </p:cNvPr>
           <p:cNvSpPr/>
           <p:nvPr/>
         </p:nvSpPr>
@@ -7114,7 +7538,13 @@
       </p:sp>
       <p:sp>
         <p:nvSpPr>
-          <p:cNvPr id="21" name="Icon FaSitemap"/>
+          <p:cNvPr id="21" name="Icon FaSitemap">
+            <a:extLst>
+              <a:ext uri="{C183D7F6-B498-43B3-948B-1728B52AA6E4}">
+                <adec:decorative xmlns:adec="http://schemas.microsoft.com/office/drawing/2017/decorative" val="1"/>
+              </a:ext>
+            </a:extLst>
+          </p:cNvPr>
           <p:cNvSpPr/>
           <p:nvPr/>
         </p:nvSpPr>
@@ -7139,7 +7569,13 @@
       </p:sp>
       <p:pic>
         <p:nvPicPr>
-          <p:cNvPr id="22" name="Image 3" descr="C:\Users\whale\git\mwb-b05\presentations\_build\icons\FaSitemap.png"/>
+          <p:cNvPr id="22" name="Image 3">
+            <a:extLst>
+              <a:ext uri="{C183D7F6-B498-43B3-948B-1728B52AA6E4}">
+                <adec:decorative xmlns:adec="http://schemas.microsoft.com/office/drawing/2017/decorative" val="1"/>
+              </a:ext>
+            </a:extLst>
+          </p:cNvPr>
           <p:cNvPicPr>
             <a:picLocks noChangeAspect="1"/>
           </p:cNvPicPr>
@@ -7288,11 +7724,11 @@
       </p:sp>
       <p:pic>
         <p:nvPicPr>
-          <p:cNvPr id="26" name="Narration">
+          <p:cNvPr id="26" name="Narration" descr="Narration for this slide; captions available">
             <a:hlinkClick r:id="" action="ppaction://media"/>
             <a:extLst>
               <a:ext uri="{FF2B5EF4-FFF2-40B4-BE49-F238E27FC236}">
-                <a16:creationId xmlns:a16="http://schemas.microsoft.com/office/drawing/2014/main" id="{83D2642F-FB67-8A2D-7910-1A1C338AC0E4}"/>
+                <a16:creationId xmlns:a16="http://schemas.microsoft.com/office/drawing/2014/main" id="{8DBC0F05-A014-30B4-2ABA-B8E5D20D0CCA}"/>
               </a:ext>
             </a:extLst>
           </p:cNvPr>
@@ -7303,7 +7739,17 @@
             <a:audioFile r:link="rId2"/>
             <p:extLst>
               <p:ext uri="{DAA4B4D4-6D71-4841-9C94-3DE7FCFB9230}">
-                <p14:media xmlns:p14="http://schemas.microsoft.com/office/powerpoint/2010/main" r:embed="rId1"/>
+                <p14:media xmlns:p14="http://schemas.microsoft.com/office/powerpoint/2010/main" r:embed="rId1">
+                  <p14:extLst>
+                    <p:ext uri="{3AFAAA56-56D3-431D-BCD4-E75A35582382}">
+                      <p173:tracksInfo xmlns:p173="http://schemas.microsoft.com/office/powerpoint/2017/3/main" displayLoc="slide">
+                        <p173:trackLst>
+                          <p173:track id="{491DE1CA-7854-4C08-9103-74164C02A96B}" label="English (captions)" lang="en-US" r:embed="rId10"/>
+                        </p173:trackLst>
+                      </p173:tracksInfo>
+                    </p:ext>
+                  </p14:extLst>
+                </p14:media>
               </p:ext>
             </p:extLst>
           </p:nvPr>
@@ -7470,7 +7916,13 @@
       </p:sp>
       <p:sp>
         <p:nvSpPr>
-          <p:cNvPr id="3" name="Tag What"/>
+          <p:cNvPr id="3" name="Tag What">
+            <a:extLst>
+              <a:ext uri="{C183D7F6-B498-43B3-948B-1728B52AA6E4}">
+                <adec:decorative xmlns:adec="http://schemas.microsoft.com/office/drawing/2017/decorative" val="1"/>
+              </a:ext>
+            </a:extLst>
+          </p:cNvPr>
           <p:cNvSpPr/>
           <p:nvPr/>
         </p:nvSpPr>
@@ -7533,7 +7985,13 @@
       </p:sp>
       <p:sp>
         <p:nvSpPr>
-          <p:cNvPr id="5" name="Pillar 0"/>
+          <p:cNvPr id="5" name="Pillar 0">
+            <a:extLst>
+              <a:ext uri="{C183D7F6-B498-43B3-948B-1728B52AA6E4}">
+                <adec:decorative xmlns:adec="http://schemas.microsoft.com/office/drawing/2017/decorative" val="1"/>
+              </a:ext>
+            </a:extLst>
+          </p:cNvPr>
           <p:cNvSpPr/>
           <p:nvPr/>
         </p:nvSpPr>
@@ -7611,7 +8069,13 @@
       </p:sp>
       <p:sp>
         <p:nvSpPr>
-          <p:cNvPr id="7" name="Pillar 1"/>
+          <p:cNvPr id="7" name="Pillar 1">
+            <a:extLst>
+              <a:ext uri="{C183D7F6-B498-43B3-948B-1728B52AA6E4}">
+                <adec:decorative xmlns:adec="http://schemas.microsoft.com/office/drawing/2017/decorative" val="1"/>
+              </a:ext>
+            </a:extLst>
+          </p:cNvPr>
           <p:cNvSpPr/>
           <p:nvPr/>
         </p:nvSpPr>
@@ -7689,7 +8153,13 @@
       </p:sp>
       <p:sp>
         <p:nvSpPr>
-          <p:cNvPr id="9" name="Pillar 2"/>
+          <p:cNvPr id="9" name="Pillar 2">
+            <a:extLst>
+              <a:ext uri="{C183D7F6-B498-43B3-948B-1728B52AA6E4}">
+                <adec:decorative xmlns:adec="http://schemas.microsoft.com/office/drawing/2017/decorative" val="1"/>
+              </a:ext>
+            </a:extLst>
+          </p:cNvPr>
           <p:cNvSpPr/>
           <p:nvPr/>
         </p:nvSpPr>
@@ -7767,7 +8237,13 @@
       </p:sp>
       <p:sp>
         <p:nvSpPr>
-          <p:cNvPr id="11" name="Pillar 3"/>
+          <p:cNvPr id="11" name="Pillar 3">
+            <a:extLst>
+              <a:ext uri="{C183D7F6-B498-43B3-948B-1728B52AA6E4}">
+                <adec:decorative xmlns:adec="http://schemas.microsoft.com/office/drawing/2017/decorative" val="1"/>
+              </a:ext>
+            </a:extLst>
+          </p:cNvPr>
           <p:cNvSpPr/>
           <p:nvPr/>
         </p:nvSpPr>
@@ -7845,7 +8321,13 @@
       </p:sp>
       <p:sp>
         <p:nvSpPr>
-          <p:cNvPr id="13" name="Pillar 4"/>
+          <p:cNvPr id="13" name="Pillar 4">
+            <a:extLst>
+              <a:ext uri="{C183D7F6-B498-43B3-948B-1728B52AA6E4}">
+                <adec:decorative xmlns:adec="http://schemas.microsoft.com/office/drawing/2017/decorative" val="1"/>
+              </a:ext>
+            </a:extLst>
+          </p:cNvPr>
           <p:cNvSpPr/>
           <p:nvPr/>
         </p:nvSpPr>
@@ -7923,7 +8405,13 @@
       </p:sp>
       <p:sp>
         <p:nvSpPr>
-          <p:cNvPr id="15" name="Autopilot box"/>
+          <p:cNvPr id="15" name="Autopilot box">
+            <a:extLst>
+              <a:ext uri="{C183D7F6-B498-43B3-948B-1728B52AA6E4}">
+                <adec:decorative xmlns:adec="http://schemas.microsoft.com/office/drawing/2017/decorative" val="1"/>
+              </a:ext>
+            </a:extLst>
+          </p:cNvPr>
           <p:cNvSpPr/>
           <p:nvPr/>
         </p:nvSpPr>
@@ -7957,7 +8445,13 @@
       </p:sp>
       <p:sp>
         <p:nvSpPr>
-          <p:cNvPr id="16" name="Icon FaLaptop"/>
+          <p:cNvPr id="16" name="Icon FaLaptop">
+            <a:extLst>
+              <a:ext uri="{C183D7F6-B498-43B3-948B-1728B52AA6E4}">
+                <adec:decorative xmlns:adec="http://schemas.microsoft.com/office/drawing/2017/decorative" val="1"/>
+              </a:ext>
+            </a:extLst>
+          </p:cNvPr>
           <p:cNvSpPr/>
           <p:nvPr/>
         </p:nvSpPr>
@@ -7982,7 +8476,13 @@
       </p:sp>
       <p:pic>
         <p:nvPicPr>
-          <p:cNvPr id="17" name="Image 0" descr="C:\Users\whale\git\mwb-b05\presentations\_build\icons\FaLaptop.png"/>
+          <p:cNvPr id="17" name="Image 0">
+            <a:extLst>
+              <a:ext uri="{C183D7F6-B498-43B3-948B-1728B52AA6E4}">
+                <adec:decorative xmlns:adec="http://schemas.microsoft.com/office/drawing/2017/decorative" val="1"/>
+              </a:ext>
+            </a:extLst>
+          </p:cNvPr>
           <p:cNvPicPr>
             <a:picLocks noChangeAspect="1"/>
           </p:cNvPicPr>
@@ -8081,7 +8581,13 @@
       </p:sp>
       <p:sp>
         <p:nvSpPr>
-          <p:cNvPr id="20" name="Doctrine"/>
+          <p:cNvPr id="20" name="Doctrine">
+            <a:extLst>
+              <a:ext uri="{C183D7F6-B498-43B3-948B-1728B52AA6E4}">
+                <adec:decorative xmlns:adec="http://schemas.microsoft.com/office/drawing/2017/decorative" val="1"/>
+              </a:ext>
+            </a:extLst>
+          </p:cNvPr>
           <p:cNvSpPr/>
           <p:nvPr/>
         </p:nvSpPr>
@@ -8115,7 +8621,13 @@
       </p:sp>
       <p:sp>
         <p:nvSpPr>
-          <p:cNvPr id="21" name="Icon FaClipboardCheck"/>
+          <p:cNvPr id="21" name="Icon FaClipboardCheck">
+            <a:extLst>
+              <a:ext uri="{C183D7F6-B498-43B3-948B-1728B52AA6E4}">
+                <adec:decorative xmlns:adec="http://schemas.microsoft.com/office/drawing/2017/decorative" val="1"/>
+              </a:ext>
+            </a:extLst>
+          </p:cNvPr>
           <p:cNvSpPr/>
           <p:nvPr/>
         </p:nvSpPr>
@@ -8140,7 +8652,13 @@
       </p:sp>
       <p:pic>
         <p:nvPicPr>
-          <p:cNvPr id="22" name="Image 1" descr="C:\Users\whale\git\mwb-b05\presentations\_build\icons\FaClipboardCheck.png"/>
+          <p:cNvPr id="22" name="Image 1">
+            <a:extLst>
+              <a:ext uri="{C183D7F6-B498-43B3-948B-1728B52AA6E4}">
+                <adec:decorative xmlns:adec="http://schemas.microsoft.com/office/drawing/2017/decorative" val="1"/>
+              </a:ext>
+            </a:extLst>
+          </p:cNvPr>
           <p:cNvPicPr>
             <a:picLocks noChangeAspect="1"/>
           </p:cNvPicPr>
@@ -8289,11 +8807,11 @@
       </p:sp>
       <p:pic>
         <p:nvPicPr>
-          <p:cNvPr id="26" name="Narration">
+          <p:cNvPr id="26" name="Narration" descr="Narration for this slide; captions available">
             <a:hlinkClick r:id="" action="ppaction://media"/>
             <a:extLst>
               <a:ext uri="{FF2B5EF4-FFF2-40B4-BE49-F238E27FC236}">
-                <a16:creationId xmlns:a16="http://schemas.microsoft.com/office/drawing/2014/main" id="{26C8F551-E556-A4C0-1CFE-E3A90F3C6DCE}"/>
+                <a16:creationId xmlns:a16="http://schemas.microsoft.com/office/drawing/2014/main" id="{9FCBAB76-BA58-079C-43F6-F640512B8E62}"/>
               </a:ext>
             </a:extLst>
           </p:cNvPr>
@@ -8304,7 +8822,17 @@
             <a:audioFile r:link="rId2"/>
             <p:extLst>
               <p:ext uri="{DAA4B4D4-6D71-4841-9C94-3DE7FCFB9230}">
-                <p14:media xmlns:p14="http://schemas.microsoft.com/office/powerpoint/2010/main" r:embed="rId1"/>
+                <p14:media xmlns:p14="http://schemas.microsoft.com/office/powerpoint/2010/main" r:embed="rId1">
+                  <p14:extLst>
+                    <p:ext uri="{3AFAAA56-56D3-431D-BCD4-E75A35582382}">
+                      <p173:tracksInfo xmlns:p173="http://schemas.microsoft.com/office/powerpoint/2017/3/main" displayLoc="slide">
+                        <p173:trackLst>
+                          <p173:track id="{49F5BB5B-AF73-4D37-9AF1-582D3C560B70}" label="English (captions)" lang="en-US" r:embed="rId8"/>
+                        </p173:trackLst>
+                      </p173:tracksInfo>
+                    </p:ext>
+                  </p14:extLst>
+                </p14:media>
               </p:ext>
             </p:extLst>
           </p:nvPr>
@@ -8471,7 +8999,13 @@
       </p:sp>
       <p:sp>
         <p:nvSpPr>
-          <p:cNvPr id="3" name="Tag What"/>
+          <p:cNvPr id="3" name="Tag What">
+            <a:extLst>
+              <a:ext uri="{C183D7F6-B498-43B3-948B-1728B52AA6E4}">
+                <adec:decorative xmlns:adec="http://schemas.microsoft.com/office/drawing/2017/decorative" val="1"/>
+              </a:ext>
+            </a:extLst>
+          </p:cNvPr>
           <p:cNvSpPr/>
           <p:nvPr/>
         </p:nvSpPr>
@@ -8534,7 +9068,13 @@
       </p:sp>
       <p:sp>
         <p:nvSpPr>
-          <p:cNvPr id="5" name="Path 0"/>
+          <p:cNvPr id="5" name="Path 0">
+            <a:extLst>
+              <a:ext uri="{C183D7F6-B498-43B3-948B-1728B52AA6E4}">
+                <adec:decorative xmlns:adec="http://schemas.microsoft.com/office/drawing/2017/decorative" val="1"/>
+              </a:ext>
+            </a:extLst>
+          </p:cNvPr>
           <p:cNvSpPr/>
           <p:nvPr/>
         </p:nvSpPr>
@@ -8661,7 +9201,13 @@
       </p:sp>
       <p:sp>
         <p:nvSpPr>
-          <p:cNvPr id="7" name="Path 1"/>
+          <p:cNvPr id="7" name="Path 1">
+            <a:extLst>
+              <a:ext uri="{C183D7F6-B498-43B3-948B-1728B52AA6E4}">
+                <adec:decorative xmlns:adec="http://schemas.microsoft.com/office/drawing/2017/decorative" val="1"/>
+              </a:ext>
+            </a:extLst>
+          </p:cNvPr>
           <p:cNvSpPr/>
           <p:nvPr/>
         </p:nvSpPr>
@@ -8788,7 +9334,13 @@
       </p:sp>
       <p:sp>
         <p:nvSpPr>
-          <p:cNvPr id="9" name="Path 2"/>
+          <p:cNvPr id="9" name="Path 2">
+            <a:extLst>
+              <a:ext uri="{C183D7F6-B498-43B3-948B-1728B52AA6E4}">
+                <adec:decorative xmlns:adec="http://schemas.microsoft.com/office/drawing/2017/decorative" val="1"/>
+              </a:ext>
+            </a:extLst>
+          </p:cNvPr>
           <p:cNvSpPr/>
           <p:nvPr/>
         </p:nvSpPr>
@@ -8915,7 +9467,13 @@
       </p:sp>
       <p:sp>
         <p:nvSpPr>
-          <p:cNvPr id="11" name="Same end"/>
+          <p:cNvPr id="11" name="Same end">
+            <a:extLst>
+              <a:ext uri="{C183D7F6-B498-43B3-948B-1728B52AA6E4}">
+                <adec:decorative xmlns:adec="http://schemas.microsoft.com/office/drawing/2017/decorative" val="1"/>
+              </a:ext>
+            </a:extLst>
+          </p:cNvPr>
           <p:cNvSpPr/>
           <p:nvPr/>
         </p:nvSpPr>
@@ -8949,7 +9507,13 @@
       </p:sp>
       <p:sp>
         <p:nvSpPr>
-          <p:cNvPr id="12" name="Icon FaClipboardCheck"/>
+          <p:cNvPr id="12" name="Icon FaClipboardCheck">
+            <a:extLst>
+              <a:ext uri="{C183D7F6-B498-43B3-948B-1728B52AA6E4}">
+                <adec:decorative xmlns:adec="http://schemas.microsoft.com/office/drawing/2017/decorative" val="1"/>
+              </a:ext>
+            </a:extLst>
+          </p:cNvPr>
           <p:cNvSpPr/>
           <p:nvPr/>
         </p:nvSpPr>
@@ -8974,7 +9538,13 @@
       </p:sp>
       <p:pic>
         <p:nvPicPr>
-          <p:cNvPr id="13" name="Image 0" descr="C:\Users\whale\git\mwb-b05\presentations\_build\icons\FaClipboardCheck.png"/>
+          <p:cNvPr id="13" name="Image 0">
+            <a:extLst>
+              <a:ext uri="{C183D7F6-B498-43B3-948B-1728B52AA6E4}">
+                <adec:decorative xmlns:adec="http://schemas.microsoft.com/office/drawing/2017/decorative" val="1"/>
+              </a:ext>
+            </a:extLst>
+          </p:cNvPr>
           <p:cNvPicPr>
             <a:picLocks noChangeAspect="1"/>
           </p:cNvPicPr>
@@ -9123,11 +9693,11 @@
       </p:sp>
       <p:pic>
         <p:nvPicPr>
-          <p:cNvPr id="16" name="Narration">
+          <p:cNvPr id="16" name="Narration" descr="Narration for this slide; captions available">
             <a:hlinkClick r:id="" action="ppaction://media"/>
             <a:extLst>
               <a:ext uri="{FF2B5EF4-FFF2-40B4-BE49-F238E27FC236}">
-                <a16:creationId xmlns:a16="http://schemas.microsoft.com/office/drawing/2014/main" id="{8DFC4ADA-90F3-3A79-0F34-CB8362A53BFD}"/>
+                <a16:creationId xmlns:a16="http://schemas.microsoft.com/office/drawing/2014/main" id="{7C35573D-1BED-3900-56C8-63ACF555BA7C}"/>
               </a:ext>
             </a:extLst>
           </p:cNvPr>
@@ -9138,7 +9708,17 @@
             <a:audioFile r:link="rId2"/>
             <p:extLst>
               <p:ext uri="{DAA4B4D4-6D71-4841-9C94-3DE7FCFB9230}">
-                <p14:media xmlns:p14="http://schemas.microsoft.com/office/powerpoint/2010/main" r:embed="rId1"/>
+                <p14:media xmlns:p14="http://schemas.microsoft.com/office/powerpoint/2010/main" r:embed="rId1">
+                  <p14:extLst>
+                    <p:ext uri="{3AFAAA56-56D3-431D-BCD4-E75A35582382}">
+                      <p173:tracksInfo xmlns:p173="http://schemas.microsoft.com/office/powerpoint/2017/3/main" displayLoc="slide">
+                        <p173:trackLst>
+                          <p173:track id="{2CF4A443-B1B5-4646-9779-430205E5EE85}" label="English (captions)" lang="en-US" r:embed="rId7"/>
+                        </p173:trackLst>
+                      </p173:tracksInfo>
+                    </p:ext>
+                  </p14:extLst>
+                </p14:media>
               </p:ext>
             </p:extLst>
           </p:nvPr>
@@ -9305,7 +9885,13 @@
       </p:sp>
       <p:sp>
         <p:nvSpPr>
-          <p:cNvPr id="3" name="Tag Who"/>
+          <p:cNvPr id="3" name="Tag Who">
+            <a:extLst>
+              <a:ext uri="{C183D7F6-B498-43B3-948B-1728B52AA6E4}">
+                <adec:decorative xmlns:adec="http://schemas.microsoft.com/office/drawing/2017/decorative" val="1"/>
+              </a:ext>
+            </a:extLst>
+          </p:cNvPr>
           <p:cNvSpPr/>
           <p:nvPr/>
         </p:nvSpPr>
@@ -9368,7 +9954,13 @@
       </p:sp>
       <p:sp>
         <p:nvSpPr>
-          <p:cNvPr id="5" name="Who col 1"/>
+          <p:cNvPr id="5" name="Who col 1">
+            <a:extLst>
+              <a:ext uri="{C183D7F6-B498-43B3-948B-1728B52AA6E4}">
+                <adec:decorative xmlns:adec="http://schemas.microsoft.com/office/drawing/2017/decorative" val="1"/>
+              </a:ext>
+            </a:extLst>
+          </p:cNvPr>
           <p:cNvSpPr/>
           <p:nvPr/>
         </p:nvSpPr>
@@ -9402,7 +9994,13 @@
       </p:sp>
       <p:sp>
         <p:nvSpPr>
-          <p:cNvPr id="6" name="Icon FaBuildingColumns"/>
+          <p:cNvPr id="6" name="Icon FaBuildingColumns">
+            <a:extLst>
+              <a:ext uri="{C183D7F6-B498-43B3-948B-1728B52AA6E4}">
+                <adec:decorative xmlns:adec="http://schemas.microsoft.com/office/drawing/2017/decorative" val="1"/>
+              </a:ext>
+            </a:extLst>
+          </p:cNvPr>
           <p:cNvSpPr/>
           <p:nvPr/>
         </p:nvSpPr>
@@ -9427,7 +10025,13 @@
       </p:sp>
       <p:pic>
         <p:nvPicPr>
-          <p:cNvPr id="7" name="Image 0" descr="C:\Users\whale\git\mwb-b05\presentations\_build\icons\FaBuildingColumns.png"/>
+          <p:cNvPr id="7" name="Image 0">
+            <a:extLst>
+              <a:ext uri="{C183D7F6-B498-43B3-948B-1728B52AA6E4}">
+                <adec:decorative xmlns:adec="http://schemas.microsoft.com/office/drawing/2017/decorative" val="1"/>
+              </a:ext>
+            </a:extLst>
+          </p:cNvPr>
           <p:cNvPicPr>
             <a:picLocks noChangeAspect="1"/>
           </p:cNvPicPr>
@@ -9614,7 +10218,13 @@
       </p:sp>
       <p:sp>
         <p:nvSpPr>
-          <p:cNvPr id="10" name="Who col 2"/>
+          <p:cNvPr id="10" name="Who col 2">
+            <a:extLst>
+              <a:ext uri="{C183D7F6-B498-43B3-948B-1728B52AA6E4}">
+                <adec:decorative xmlns:adec="http://schemas.microsoft.com/office/drawing/2017/decorative" val="1"/>
+              </a:ext>
+            </a:extLst>
+          </p:cNvPr>
           <p:cNvSpPr/>
           <p:nvPr/>
         </p:nvSpPr>
@@ -9648,7 +10258,13 @@
       </p:sp>
       <p:sp>
         <p:nvSpPr>
-          <p:cNvPr id="11" name="Icon FaUsersGear"/>
+          <p:cNvPr id="11" name="Icon FaUsersGear">
+            <a:extLst>
+              <a:ext uri="{C183D7F6-B498-43B3-948B-1728B52AA6E4}">
+                <adec:decorative xmlns:adec="http://schemas.microsoft.com/office/drawing/2017/decorative" val="1"/>
+              </a:ext>
+            </a:extLst>
+          </p:cNvPr>
           <p:cNvSpPr/>
           <p:nvPr/>
         </p:nvSpPr>
@@ -9673,7 +10289,13 @@
       </p:sp>
       <p:pic>
         <p:nvPicPr>
-          <p:cNvPr id="12" name="Image 1" descr="C:\Users\whale\git\mwb-b05\presentations\_build\icons\FaUsersGear.png"/>
+          <p:cNvPr id="12" name="Image 1">
+            <a:extLst>
+              <a:ext uri="{C183D7F6-B498-43B3-948B-1728B52AA6E4}">
+                <adec:decorative xmlns:adec="http://schemas.microsoft.com/office/drawing/2017/decorative" val="1"/>
+              </a:ext>
+            </a:extLst>
+          </p:cNvPr>
           <p:cNvPicPr>
             <a:picLocks noChangeAspect="1"/>
           </p:cNvPicPr>
@@ -9860,7 +10482,13 @@
       </p:sp>
       <p:sp>
         <p:nvSpPr>
-          <p:cNvPr id="15" name="Who col 3"/>
+          <p:cNvPr id="15" name="Who col 3">
+            <a:extLst>
+              <a:ext uri="{C183D7F6-B498-43B3-948B-1728B52AA6E4}">
+                <adec:decorative xmlns:adec="http://schemas.microsoft.com/office/drawing/2017/decorative" val="1"/>
+              </a:ext>
+            </a:extLst>
+          </p:cNvPr>
           <p:cNvSpPr/>
           <p:nvPr/>
         </p:nvSpPr>
@@ -9894,7 +10522,13 @@
       </p:sp>
       <p:sp>
         <p:nvSpPr>
-          <p:cNvPr id="16" name="Icon FaPeopleArrows"/>
+          <p:cNvPr id="16" name="Icon FaPeopleArrows">
+            <a:extLst>
+              <a:ext uri="{C183D7F6-B498-43B3-948B-1728B52AA6E4}">
+                <adec:decorative xmlns:adec="http://schemas.microsoft.com/office/drawing/2017/decorative" val="1"/>
+              </a:ext>
+            </a:extLst>
+          </p:cNvPr>
           <p:cNvSpPr/>
           <p:nvPr/>
         </p:nvSpPr>
@@ -9919,7 +10553,13 @@
       </p:sp>
       <p:pic>
         <p:nvPicPr>
-          <p:cNvPr id="17" name="Image 2" descr="C:\Users\whale\git\mwb-b05\presentations\_build\icons\FaPeopleArrows.png"/>
+          <p:cNvPr id="17" name="Image 2">
+            <a:extLst>
+              <a:ext uri="{C183D7F6-B498-43B3-948B-1728B52AA6E4}">
+                <adec:decorative xmlns:adec="http://schemas.microsoft.com/office/drawing/2017/decorative" val="1"/>
+              </a:ext>
+            </a:extLst>
+          </p:cNvPr>
           <p:cNvPicPr>
             <a:picLocks noChangeAspect="1"/>
           </p:cNvPicPr>
@@ -10106,7 +10746,13 @@
       </p:sp>
       <p:sp>
         <p:nvSpPr>
-          <p:cNvPr id="20" name="Least"/>
+          <p:cNvPr id="20" name="Least">
+            <a:extLst>
+              <a:ext uri="{C183D7F6-B498-43B3-948B-1728B52AA6E4}">
+                <adec:decorative xmlns:adec="http://schemas.microsoft.com/office/drawing/2017/decorative" val="1"/>
+              </a:ext>
+            </a:extLst>
+          </p:cNvPr>
           <p:cNvSpPr/>
           <p:nvPr/>
         </p:nvSpPr>
@@ -10140,7 +10786,13 @@
       </p:sp>
       <p:sp>
         <p:nvSpPr>
-          <p:cNvPr id="21" name="Icon FaUserShield"/>
+          <p:cNvPr id="21" name="Icon FaUserShield">
+            <a:extLst>
+              <a:ext uri="{C183D7F6-B498-43B3-948B-1728B52AA6E4}">
+                <adec:decorative xmlns:adec="http://schemas.microsoft.com/office/drawing/2017/decorative" val="1"/>
+              </a:ext>
+            </a:extLst>
+          </p:cNvPr>
           <p:cNvSpPr/>
           <p:nvPr/>
         </p:nvSpPr>
@@ -10165,7 +10817,13 @@
       </p:sp>
       <p:pic>
         <p:nvPicPr>
-          <p:cNvPr id="22" name="Image 3" descr="C:\Users\whale\git\mwb-b05\presentations\_build\icons\FaUserShield.png"/>
+          <p:cNvPr id="22" name="Image 3">
+            <a:extLst>
+              <a:ext uri="{C183D7F6-B498-43B3-948B-1728B52AA6E4}">
+                <adec:decorative xmlns:adec="http://schemas.microsoft.com/office/drawing/2017/decorative" val="1"/>
+              </a:ext>
+            </a:extLst>
+          </p:cNvPr>
           <p:cNvPicPr>
             <a:picLocks noChangeAspect="1"/>
           </p:cNvPicPr>
@@ -10314,11 +10972,11 @@
       </p:sp>
       <p:pic>
         <p:nvPicPr>
-          <p:cNvPr id="26" name="Narration">
+          <p:cNvPr id="26" name="Narration" descr="Narration for this slide; captions available">
             <a:hlinkClick r:id="" action="ppaction://media"/>
             <a:extLst>
               <a:ext uri="{FF2B5EF4-FFF2-40B4-BE49-F238E27FC236}">
-                <a16:creationId xmlns:a16="http://schemas.microsoft.com/office/drawing/2014/main" id="{6A95D4C4-4AA8-22FE-3F08-CE5C535AA441}"/>
+                <a16:creationId xmlns:a16="http://schemas.microsoft.com/office/drawing/2014/main" id="{38FF52FD-66B6-B5CA-2DDA-826887F88C57}"/>
               </a:ext>
             </a:extLst>
           </p:cNvPr>
@@ -10329,7 +10987,17 @@
             <a:audioFile r:link="rId2"/>
             <p:extLst>
               <p:ext uri="{DAA4B4D4-6D71-4841-9C94-3DE7FCFB9230}">
-                <p14:media xmlns:p14="http://schemas.microsoft.com/office/powerpoint/2010/main" r:embed="rId1"/>
+                <p14:media xmlns:p14="http://schemas.microsoft.com/office/powerpoint/2010/main" r:embed="rId1">
+                  <p14:extLst>
+                    <p:ext uri="{3AFAAA56-56D3-431D-BCD4-E75A35582382}">
+                      <p173:tracksInfo xmlns:p173="http://schemas.microsoft.com/office/powerpoint/2017/3/main" displayLoc="slide">
+                        <p173:trackLst>
+                          <p173:track id="{E2F4AAB9-0D80-4081-BE1F-FF5A0A33EDE8}" label="English (captions)" lang="en-US" r:embed="rId10"/>
+                        </p173:trackLst>
+                      </p173:tracksInfo>
+                    </p:ext>
+                  </p14:extLst>
+                </p14:media>
               </p:ext>
             </p:extLst>
           </p:nvPr>
@@ -10496,7 +11164,13 @@
       </p:sp>
       <p:sp>
         <p:nvSpPr>
-          <p:cNvPr id="3" name="Tag How"/>
+          <p:cNvPr id="3" name="Tag How">
+            <a:extLst>
+              <a:ext uri="{C183D7F6-B498-43B3-948B-1728B52AA6E4}">
+                <adec:decorative xmlns:adec="http://schemas.microsoft.com/office/drawing/2017/decorative" val="1"/>
+              </a:ext>
+            </a:extLst>
+          </p:cNvPr>
           <p:cNvSpPr/>
           <p:nvPr/>
         </p:nvSpPr>
@@ -10559,7 +11233,13 @@
       </p:sp>
       <p:sp>
         <p:nvSpPr>
-          <p:cNvPr id="5" name="Step 0"/>
+          <p:cNvPr id="5" name="Step 0">
+            <a:extLst>
+              <a:ext uri="{C183D7F6-B498-43B3-948B-1728B52AA6E4}">
+                <adec:decorative xmlns:adec="http://schemas.microsoft.com/office/drawing/2017/decorative" val="1"/>
+              </a:ext>
+            </a:extLst>
+          </p:cNvPr>
           <p:cNvSpPr/>
           <p:nvPr/>
         </p:nvSpPr>
@@ -10646,7 +11326,13 @@
       </p:sp>
       <p:sp>
         <p:nvSpPr>
-          <p:cNvPr id="7" name="Step 1"/>
+          <p:cNvPr id="7" name="Step 1">
+            <a:extLst>
+              <a:ext uri="{C183D7F6-B498-43B3-948B-1728B52AA6E4}">
+                <adec:decorative xmlns:adec="http://schemas.microsoft.com/office/drawing/2017/decorative" val="1"/>
+              </a:ext>
+            </a:extLst>
+          </p:cNvPr>
           <p:cNvSpPr/>
           <p:nvPr/>
         </p:nvSpPr>
@@ -10733,7 +11419,13 @@
       </p:sp>
       <p:sp>
         <p:nvSpPr>
-          <p:cNvPr id="9" name="Step 2"/>
+          <p:cNvPr id="9" name="Step 2">
+            <a:extLst>
+              <a:ext uri="{C183D7F6-B498-43B3-948B-1728B52AA6E4}">
+                <adec:decorative xmlns:adec="http://schemas.microsoft.com/office/drawing/2017/decorative" val="1"/>
+              </a:ext>
+            </a:extLst>
+          </p:cNvPr>
           <p:cNvSpPr/>
           <p:nvPr/>
         </p:nvSpPr>
@@ -10820,7 +11512,13 @@
       </p:sp>
       <p:sp>
         <p:nvSpPr>
-          <p:cNvPr id="11" name="Step 3"/>
+          <p:cNvPr id="11" name="Step 3">
+            <a:extLst>
+              <a:ext uri="{C183D7F6-B498-43B3-948B-1728B52AA6E4}">
+                <adec:decorative xmlns:adec="http://schemas.microsoft.com/office/drawing/2017/decorative" val="1"/>
+              </a:ext>
+            </a:extLst>
+          </p:cNvPr>
           <p:cNvSpPr/>
           <p:nvPr/>
         </p:nvSpPr>
@@ -10907,7 +11605,13 @@
       </p:sp>
       <p:sp>
         <p:nvSpPr>
-          <p:cNvPr id="13" name="Step 4"/>
+          <p:cNvPr id="13" name="Step 4">
+            <a:extLst>
+              <a:ext uri="{C183D7F6-B498-43B3-948B-1728B52AA6E4}">
+                <adec:decorative xmlns:adec="http://schemas.microsoft.com/office/drawing/2017/decorative" val="1"/>
+              </a:ext>
+            </a:extLst>
+          </p:cNvPr>
           <p:cNvSpPr/>
           <p:nvPr/>
         </p:nvSpPr>
@@ -10994,7 +11698,13 @@
       </p:sp>
       <p:sp>
         <p:nvSpPr>
-          <p:cNvPr id="15" name="Step 5"/>
+          <p:cNvPr id="15" name="Step 5">
+            <a:extLst>
+              <a:ext uri="{C183D7F6-B498-43B3-948B-1728B52AA6E4}">
+                <adec:decorative xmlns:adec="http://schemas.microsoft.com/office/drawing/2017/decorative" val="1"/>
+              </a:ext>
+            </a:extLst>
+          </p:cNvPr>
           <p:cNvSpPr/>
           <p:nvPr/>
         </p:nvSpPr>
@@ -11081,7 +11791,13 @@
       </p:sp>
       <p:sp>
         <p:nvSpPr>
-          <p:cNvPr id="17" name="Step 6"/>
+          <p:cNvPr id="17" name="Step 6">
+            <a:extLst>
+              <a:ext uri="{C183D7F6-B498-43B3-948B-1728B52AA6E4}">
+                <adec:decorative xmlns:adec="http://schemas.microsoft.com/office/drawing/2017/decorative" val="1"/>
+              </a:ext>
+            </a:extLst>
+          </p:cNvPr>
           <p:cNvSpPr/>
           <p:nvPr/>
         </p:nvSpPr>
@@ -11262,7 +11978,13 @@
       </p:sp>
       <p:sp>
         <p:nvSpPr>
-          <p:cNvPr id="20" name="Analytics"/>
+          <p:cNvPr id="20" name="Analytics">
+            <a:extLst>
+              <a:ext uri="{C183D7F6-B498-43B3-948B-1728B52AA6E4}">
+                <adec:decorative xmlns:adec="http://schemas.microsoft.com/office/drawing/2017/decorative" val="1"/>
+              </a:ext>
+            </a:extLst>
+          </p:cNvPr>
           <p:cNvSpPr/>
           <p:nvPr/>
         </p:nvSpPr>
@@ -11296,7 +12018,13 @@
       </p:sp>
       <p:sp>
         <p:nvSpPr>
-          <p:cNvPr id="21" name="Icon FaFilter"/>
+          <p:cNvPr id="21" name="Icon FaFilter">
+            <a:extLst>
+              <a:ext uri="{C183D7F6-B498-43B3-948B-1728B52AA6E4}">
+                <adec:decorative xmlns:adec="http://schemas.microsoft.com/office/drawing/2017/decorative" val="1"/>
+              </a:ext>
+            </a:extLst>
+          </p:cNvPr>
           <p:cNvSpPr/>
           <p:nvPr/>
         </p:nvSpPr>
@@ -11321,7 +12049,13 @@
       </p:sp>
       <p:pic>
         <p:nvPicPr>
-          <p:cNvPr id="22" name="Image 0" descr="C:\Users\whale\git\mwb-b05\presentations\_build\icons\FaFilter.png"/>
+          <p:cNvPr id="22" name="Image 0">
+            <a:extLst>
+              <a:ext uri="{C183D7F6-B498-43B3-948B-1728B52AA6E4}">
+                <adec:decorative xmlns:adec="http://schemas.microsoft.com/office/drawing/2017/decorative" val="1"/>
+              </a:ext>
+            </a:extLst>
+          </p:cNvPr>
           <p:cNvPicPr>
             <a:picLocks noChangeAspect="1"/>
           </p:cNvPicPr>
@@ -11470,11 +12204,11 @@
       </p:sp>
       <p:pic>
         <p:nvPicPr>
-          <p:cNvPr id="26" name="Narration">
+          <p:cNvPr id="26" name="Narration" descr="Narration for this slide; captions available">
             <a:hlinkClick r:id="" action="ppaction://media"/>
             <a:extLst>
               <a:ext uri="{FF2B5EF4-FFF2-40B4-BE49-F238E27FC236}">
-                <a16:creationId xmlns:a16="http://schemas.microsoft.com/office/drawing/2014/main" id="{2F40826C-F4AA-0F8C-3027-A46F8DC50354}"/>
+                <a16:creationId xmlns:a16="http://schemas.microsoft.com/office/drawing/2014/main" id="{EB6CB383-2491-E5C7-F0D0-60C8AB32F367}"/>
               </a:ext>
             </a:extLst>
           </p:cNvPr>
@@ -11485,7 +12219,17 @@
             <a:audioFile r:link="rId2"/>
             <p:extLst>
               <p:ext uri="{DAA4B4D4-6D71-4841-9C94-3DE7FCFB9230}">
-                <p14:media xmlns:p14="http://schemas.microsoft.com/office/powerpoint/2010/main" r:embed="rId1"/>
+                <p14:media xmlns:p14="http://schemas.microsoft.com/office/powerpoint/2010/main" r:embed="rId1">
+                  <p14:extLst>
+                    <p:ext uri="{3AFAAA56-56D3-431D-BCD4-E75A35582382}">
+                      <p173:tracksInfo xmlns:p173="http://schemas.microsoft.com/office/powerpoint/2017/3/main" displayLoc="slide">
+                        <p173:trackLst>
+                          <p173:track id="{C56C4BD2-7F77-42A7-9760-E6486E5FC4B3}" label="English (captions)" lang="en-US" r:embed="rId7"/>
+                        </p173:trackLst>
+                      </p173:tracksInfo>
+                    </p:ext>
+                  </p14:extLst>
+                </p14:media>
               </p:ext>
             </p:extLst>
           </p:nvPr>
@@ -11652,7 +12396,13 @@
       </p:sp>
       <p:sp>
         <p:nvSpPr>
-          <p:cNvPr id="3" name="Tag How"/>
+          <p:cNvPr id="3" name="Tag How">
+            <a:extLst>
+              <a:ext uri="{C183D7F6-B498-43B3-948B-1728B52AA6E4}">
+                <adec:decorative xmlns:adec="http://schemas.microsoft.com/office/drawing/2017/decorative" val="1"/>
+              </a:ext>
+            </a:extLst>
+          </p:cNvPr>
           <p:cNvSpPr/>
           <p:nvPr/>
         </p:nvSpPr>
@@ -11734,7 +12484,7 @@
         <a:graphic>
           <a:graphicData uri="http://schemas.openxmlformats.org/drawingml/2006/table">
             <a:tbl>
-              <a:tblPr/>
+              <a:tblPr firstRow="1" bandRow="1"/>
               <a:tblGrid>
                 <a:gridCol w="3108960">
                   <a:extLst>
@@ -13452,7 +14202,13 @@
       </p:graphicFrame>
       <p:sp>
         <p:nvSpPr>
-          <p:cNvPr id="6" name="Floor box"/>
+          <p:cNvPr id="6" name="Floor box">
+            <a:extLst>
+              <a:ext uri="{C183D7F6-B498-43B3-948B-1728B52AA6E4}">
+                <adec:decorative xmlns:adec="http://schemas.microsoft.com/office/drawing/2017/decorative" val="1"/>
+              </a:ext>
+            </a:extLst>
+          </p:cNvPr>
           <p:cNvSpPr/>
           <p:nvPr/>
         </p:nvSpPr>
@@ -13486,7 +14242,13 @@
       </p:sp>
       <p:sp>
         <p:nvSpPr>
-          <p:cNvPr id="7" name="Icon FaLaptop"/>
+          <p:cNvPr id="7" name="Icon FaLaptop">
+            <a:extLst>
+              <a:ext uri="{C183D7F6-B498-43B3-948B-1728B52AA6E4}">
+                <adec:decorative xmlns:adec="http://schemas.microsoft.com/office/drawing/2017/decorative" val="1"/>
+              </a:ext>
+            </a:extLst>
+          </p:cNvPr>
           <p:cNvSpPr/>
           <p:nvPr/>
         </p:nvSpPr>
@@ -13511,7 +14273,13 @@
       </p:sp>
       <p:pic>
         <p:nvPicPr>
-          <p:cNvPr id="8" name="Image 0" descr="C:\Users\whale\git\mwb-b05\presentations\_build\icons\FaLaptop.png"/>
+          <p:cNvPr id="8" name="Image 0">
+            <a:extLst>
+              <a:ext uri="{C183D7F6-B498-43B3-948B-1728B52AA6E4}">
+                <adec:decorative xmlns:adec="http://schemas.microsoft.com/office/drawing/2017/decorative" val="1"/>
+              </a:ext>
+            </a:extLst>
+          </p:cNvPr>
           <p:cNvPicPr>
             <a:picLocks noChangeAspect="1"/>
           </p:cNvPicPr>
@@ -13588,7 +14356,13 @@
       </p:sp>
       <p:sp>
         <p:nvSpPr>
-          <p:cNvPr id="5" name="Estimates"/>
+          <p:cNvPr id="5" name="Estimates">
+            <a:extLst>
+              <a:ext uri="{C183D7F6-B498-43B3-948B-1728B52AA6E4}">
+                <adec:decorative xmlns:adec="http://schemas.microsoft.com/office/drawing/2017/decorative" val="1"/>
+              </a:ext>
+            </a:extLst>
+          </p:cNvPr>
           <p:cNvSpPr/>
           <p:nvPr/>
         </p:nvSpPr>
@@ -13622,7 +14396,13 @@
       </p:sp>
       <p:sp>
         <p:nvSpPr>
-          <p:cNvPr id="11" name="Icon FaClipboardCheck"/>
+          <p:cNvPr id="11" name="Icon FaClipboardCheck">
+            <a:extLst>
+              <a:ext uri="{C183D7F6-B498-43B3-948B-1728B52AA6E4}">
+                <adec:decorative xmlns:adec="http://schemas.microsoft.com/office/drawing/2017/decorative" val="1"/>
+              </a:ext>
+            </a:extLst>
+          </p:cNvPr>
           <p:cNvSpPr/>
           <p:nvPr/>
         </p:nvSpPr>
@@ -13647,7 +14427,13 @@
       </p:sp>
       <p:pic>
         <p:nvPicPr>
-          <p:cNvPr id="12" name="Image 1" descr="C:\Users\whale\git\mwb-b05\presentations\_build\icons\FaClipboardCheck.png"/>
+          <p:cNvPr id="12" name="Image 1">
+            <a:extLst>
+              <a:ext uri="{C183D7F6-B498-43B3-948B-1728B52AA6E4}">
+                <adec:decorative xmlns:adec="http://schemas.microsoft.com/office/drawing/2017/decorative" val="1"/>
+              </a:ext>
+            </a:extLst>
+          </p:cNvPr>
           <p:cNvPicPr>
             <a:picLocks noChangeAspect="1"/>
           </p:cNvPicPr>
@@ -13796,11 +14582,11 @@
       </p:sp>
       <p:pic>
         <p:nvPicPr>
-          <p:cNvPr id="15" name="Narration">
+          <p:cNvPr id="15" name="Narration" descr="Narration for this slide; captions available">
             <a:hlinkClick r:id="" action="ppaction://media"/>
             <a:extLst>
               <a:ext uri="{FF2B5EF4-FFF2-40B4-BE49-F238E27FC236}">
-                <a16:creationId xmlns:a16="http://schemas.microsoft.com/office/drawing/2014/main" id="{1ED4FEEA-D259-2D2F-D59F-C53774AC1AFA}"/>
+                <a16:creationId xmlns:a16="http://schemas.microsoft.com/office/drawing/2014/main" id="{01E5EF90-DA6F-CFF7-33BD-AAC2EE9EEEAD}"/>
               </a:ext>
             </a:extLst>
           </p:cNvPr>
@@ -13811,7 +14597,17 @@
             <a:audioFile r:link="rId2"/>
             <p:extLst>
               <p:ext uri="{DAA4B4D4-6D71-4841-9C94-3DE7FCFB9230}">
-                <p14:media xmlns:p14="http://schemas.microsoft.com/office/powerpoint/2010/main" r:embed="rId1"/>
+                <p14:media xmlns:p14="http://schemas.microsoft.com/office/powerpoint/2010/main" r:embed="rId1">
+                  <p14:extLst>
+                    <p:ext uri="{3AFAAA56-56D3-431D-BCD4-E75A35582382}">
+                      <p173:tracksInfo xmlns:p173="http://schemas.microsoft.com/office/powerpoint/2017/3/main" displayLoc="slide">
+                        <p173:trackLst>
+                          <p173:track id="{3B363AD3-29F2-4024-A58F-B0E12B8AA278}" label="English (captions)" lang="en-US" r:embed="rId8"/>
+                        </p173:trackLst>
+                      </p173:tracksInfo>
+                    </p:ext>
+                  </p14:extLst>
+                </p14:media>
               </p:ext>
             </p:extLst>
           </p:nvPr>
@@ -13917,9 +14713,9 @@
 </file>
 
 <file path=ppt/theme/theme1.xml><?xml version="1.0" encoding="utf-8"?>
-<a:theme xmlns:a="http://schemas.openxmlformats.org/drawingml/2006/main" name="Modernization Workbook">
+<a:theme xmlns:a="http://schemas.openxmlformats.org/drawingml/2006/main" name="Federal Modernization Workbook">
   <a:themeElements>
-    <a:clrScheme name="Modernization Workbook">
+    <a:clrScheme name="Federal Modernization Workbook">
       <a:dk1>
         <a:srgbClr val="1F2A44"/>
       </a:dk1>
@@ -13957,7 +14753,7 @@
         <a:srgbClr val="334155"/>
       </a:folHlink>
     </a:clrScheme>
-    <a:fontScheme name="Modernization Workbook">
+    <a:fontScheme name="Federal Modernization Workbook">
       <a:majorFont>
         <a:latin typeface="Cambria"/>
         <a:ea typeface=""/>

--- a/presentations/b05-devices/B05_Devices_Narrated.pptx
+++ b/presentations/b05-devices/B05_Devices_Narrated.pptx
@@ -181,7 +181,7 @@
     </p:spTree>
     <p:extLst>
       <p:ext uri="{BB962C8B-B14F-4D97-AF65-F5344CB8AC3E}">
-        <p14:creationId xmlns:p14="http://schemas.microsoft.com/office/powerpoint/2010/main" val="4227438426"/>
+        <p14:creationId xmlns:p14="http://schemas.microsoft.com/office/powerpoint/2010/main" val="4275907371"/>
       </p:ext>
     </p:extLst>
   </p:cSld>
@@ -2250,7 +2250,7 @@
             <a:hlinkClick r:id="" action="ppaction://media"/>
             <a:extLst>
               <a:ext uri="{FF2B5EF4-FFF2-40B4-BE49-F238E27FC236}">
-                <a16:creationId xmlns:a16="http://schemas.microsoft.com/office/drawing/2014/main" id="{5F37BC30-A6F3-2766-79EF-264453F83A7B}"/>
+                <a16:creationId xmlns:a16="http://schemas.microsoft.com/office/drawing/2014/main" id="{B126D950-79F9-A77D-25A4-EAA0C1F561C3}"/>
               </a:ext>
             </a:extLst>
           </p:cNvPr>
@@ -2266,7 +2266,7 @@
                     <p:ext uri="{3AFAAA56-56D3-431D-BCD4-E75A35582382}">
                       <p173:tracksInfo xmlns:p173="http://schemas.microsoft.com/office/powerpoint/2017/3/main" displayLoc="slide">
                         <p173:trackLst>
-                          <p173:track id="{96D1C4DE-86C3-4452-BA94-417A07B8A310}" label="English (captions)" lang="en-US" r:embed="rId6"/>
+                          <p173:track id="{B0C420A0-B981-4A7F-BA2A-0BFDADA41D92}" label="English (captions)" lang="en-US" r:embed="rId6"/>
                         </p173:trackLst>
                       </p173:tracksInfo>
                     </p:ext>
@@ -3256,7 +3256,7 @@
             <a:hlinkClick r:id="" action="ppaction://media"/>
             <a:extLst>
               <a:ext uri="{FF2B5EF4-FFF2-40B4-BE49-F238E27FC236}">
-                <a16:creationId xmlns:a16="http://schemas.microsoft.com/office/drawing/2014/main" id="{5CD9B4D5-D9F5-3F41-B535-B6BECAC781B6}"/>
+                <a16:creationId xmlns:a16="http://schemas.microsoft.com/office/drawing/2014/main" id="{F191D7F6-FFC5-252E-0C7A-10E1CC2DE66B}"/>
               </a:ext>
             </a:extLst>
           </p:cNvPr>
@@ -3272,7 +3272,7 @@
                     <p:ext uri="{3AFAAA56-56D3-431D-BCD4-E75A35582382}">
                       <p173:tracksInfo xmlns:p173="http://schemas.microsoft.com/office/powerpoint/2017/3/main" displayLoc="slide">
                         <p173:trackLst>
-                          <p173:track id="{8099743E-C6CF-4A79-B6D1-8B8E9438B183}" label="English (captions)" lang="en-US" r:embed="rId10"/>
+                          <p173:track id="{D79B27B3-C779-45FF-8D65-DAFCA1189DD5}" label="English (captions)" lang="en-US" r:embed="rId10"/>
                         </p173:trackLst>
                       </p173:tracksInfo>
                     </p:ext>
@@ -4089,7 +4089,7 @@
             <a:hlinkClick r:id="" action="ppaction://media"/>
             <a:extLst>
               <a:ext uri="{FF2B5EF4-FFF2-40B4-BE49-F238E27FC236}">
-                <a16:creationId xmlns:a16="http://schemas.microsoft.com/office/drawing/2014/main" id="{13038B7C-FB4B-5050-332F-FE34C2B98C79}"/>
+                <a16:creationId xmlns:a16="http://schemas.microsoft.com/office/drawing/2014/main" id="{FF6EE846-0EB1-D80C-278F-96BAAE1364B3}"/>
               </a:ext>
             </a:extLst>
           </p:cNvPr>
@@ -4105,7 +4105,7 @@
                     <p:ext uri="{3AFAAA56-56D3-431D-BCD4-E75A35582382}">
                       <p173:tracksInfo xmlns:p173="http://schemas.microsoft.com/office/powerpoint/2017/3/main" displayLoc="slide">
                         <p173:trackLst>
-                          <p173:track id="{2916D8B4-5472-41F2-8A4A-8F2E63C3E241}" label="English (captions)" lang="en-US" r:embed="rId8"/>
+                          <p173:track id="{5D70EB51-9D7A-442B-8968-FC5CB82C7DA4}" label="English (captions)" lang="en-US" r:embed="rId8"/>
                         </p173:trackLst>
                       </p173:tracksInfo>
                     </p:ext>
@@ -5280,7 +5280,7 @@
             <a:hlinkClick r:id="" action="ppaction://media"/>
             <a:extLst>
               <a:ext uri="{FF2B5EF4-FFF2-40B4-BE49-F238E27FC236}">
-                <a16:creationId xmlns:a16="http://schemas.microsoft.com/office/drawing/2014/main" id="{940BD238-E247-415E-DAD3-9BAC464873FD}"/>
+                <a16:creationId xmlns:a16="http://schemas.microsoft.com/office/drawing/2014/main" id="{1302F32E-9248-AA00-0A2D-77A28473AA99}"/>
               </a:ext>
             </a:extLst>
           </p:cNvPr>
@@ -5296,7 +5296,7 @@
                     <p:ext uri="{3AFAAA56-56D3-431D-BCD4-E75A35582382}">
                       <p173:tracksInfo xmlns:p173="http://schemas.microsoft.com/office/powerpoint/2017/3/main" displayLoc="slide">
                         <p173:trackLst>
-                          <p173:track id="{ED7C3FC3-30A4-469F-87A8-8A6984D6139C}" label="English (captions)" lang="en-US" r:embed="rId8"/>
+                          <p173:track id="{C5F946B9-E31F-491F-9F13-B4C4B3E8B9F1}" label="English (captions)" lang="en-US" r:embed="rId8"/>
                         </p173:trackLst>
                       </p173:tracksInfo>
                     </p:ext>
@@ -5329,10 +5329,10 @@
   </p:clrMapOvr>
   <mc:AlternateContent xmlns:mc="http://schemas.openxmlformats.org/markup-compatibility/2006">
     <mc:Choice xmlns:p14="http://schemas.microsoft.com/office/powerpoint/2010/main" Requires="p14">
-      <p:transition spd="slow" p14:dur="2000" advTm="72260"/>
+      <p:transition spd="slow" p14:dur="2000" advTm="74180"/>
     </mc:Choice>
     <mc:Fallback>
-      <p:transition spd="slow" advTm="72260"/>
+      <p:transition spd="slow" advTm="74180"/>
     </mc:Fallback>
   </mc:AlternateContent>
   <p:timing>
@@ -5366,7 +5366,7 @@
                                   <p:childTnLst>
                                     <p:cmd type="call" cmd="playFrom(0.0)">
                                       <p:cBhvr>
-                                        <p:cTn id="6" dur="71256" fill="hold"/>
+                                        <p:cTn id="6" dur="73176" fill="hold"/>
                                         <p:tgtEl>
                                           <p:spTgt spid="27"/>
                                         </p:tgtEl>
@@ -6597,7 +6597,7 @@
             <a:hlinkClick r:id="" action="ppaction://media"/>
             <a:extLst>
               <a:ext uri="{FF2B5EF4-FFF2-40B4-BE49-F238E27FC236}">
-                <a16:creationId xmlns:a16="http://schemas.microsoft.com/office/drawing/2014/main" id="{E2994411-054E-0222-BAAB-D1141C4D92DA}"/>
+                <a16:creationId xmlns:a16="http://schemas.microsoft.com/office/drawing/2014/main" id="{1AC273C4-BE06-C1C2-FA53-FCF13BFC6C50}"/>
               </a:ext>
             </a:extLst>
           </p:cNvPr>
@@ -6613,7 +6613,7 @@
                     <p:ext uri="{3AFAAA56-56D3-431D-BCD4-E75A35582382}">
                       <p173:tracksInfo xmlns:p173="http://schemas.microsoft.com/office/powerpoint/2017/3/main" displayLoc="slide">
                         <p173:trackLst>
-                          <p173:track id="{BCCD64AA-A8B7-4017-8782-8C303A46A140}" label="English (captions)" lang="en-US" r:embed="rId8"/>
+                          <p173:track id="{2283014B-5C6E-47F3-96F2-79C5DA5938CC}" label="English (captions)" lang="en-US" r:embed="rId8"/>
                         </p173:trackLst>
                       </p173:tracksInfo>
                     </p:ext>
@@ -7728,7 +7728,7 @@
             <a:hlinkClick r:id="" action="ppaction://media"/>
             <a:extLst>
               <a:ext uri="{FF2B5EF4-FFF2-40B4-BE49-F238E27FC236}">
-                <a16:creationId xmlns:a16="http://schemas.microsoft.com/office/drawing/2014/main" id="{8DBC0F05-A014-30B4-2ABA-B8E5D20D0CCA}"/>
+                <a16:creationId xmlns:a16="http://schemas.microsoft.com/office/drawing/2014/main" id="{B1031B07-4018-F664-7C9A-477EFC2AAAB2}"/>
               </a:ext>
             </a:extLst>
           </p:cNvPr>
@@ -7744,7 +7744,7 @@
                     <p:ext uri="{3AFAAA56-56D3-431D-BCD4-E75A35582382}">
                       <p173:tracksInfo xmlns:p173="http://schemas.microsoft.com/office/powerpoint/2017/3/main" displayLoc="slide">
                         <p173:trackLst>
-                          <p173:track id="{491DE1CA-7854-4C08-9103-74164C02A96B}" label="English (captions)" lang="en-US" r:embed="rId10"/>
+                          <p173:track id="{B218501F-99DF-4BD9-8A02-96EF42E4E03E}" label="English (captions)" lang="en-US" r:embed="rId10"/>
                         </p173:trackLst>
                       </p173:tracksInfo>
                     </p:ext>
@@ -8811,7 +8811,7 @@
             <a:hlinkClick r:id="" action="ppaction://media"/>
             <a:extLst>
               <a:ext uri="{FF2B5EF4-FFF2-40B4-BE49-F238E27FC236}">
-                <a16:creationId xmlns:a16="http://schemas.microsoft.com/office/drawing/2014/main" id="{9FCBAB76-BA58-079C-43F6-F640512B8E62}"/>
+                <a16:creationId xmlns:a16="http://schemas.microsoft.com/office/drawing/2014/main" id="{4E599C59-A347-EEAD-3529-A39D46DE64A8}"/>
               </a:ext>
             </a:extLst>
           </p:cNvPr>
@@ -8827,7 +8827,7 @@
                     <p:ext uri="{3AFAAA56-56D3-431D-BCD4-E75A35582382}">
                       <p173:tracksInfo xmlns:p173="http://schemas.microsoft.com/office/powerpoint/2017/3/main" displayLoc="slide">
                         <p173:trackLst>
-                          <p173:track id="{49F5BB5B-AF73-4D37-9AF1-582D3C560B70}" label="English (captions)" lang="en-US" r:embed="rId8"/>
+                          <p173:track id="{FBB01966-1F86-4DD4-9D99-5B85563B44A2}" label="English (captions)" lang="en-US" r:embed="rId8"/>
                         </p173:trackLst>
                       </p173:tracksInfo>
                     </p:ext>
@@ -9697,7 +9697,7 @@
             <a:hlinkClick r:id="" action="ppaction://media"/>
             <a:extLst>
               <a:ext uri="{FF2B5EF4-FFF2-40B4-BE49-F238E27FC236}">
-                <a16:creationId xmlns:a16="http://schemas.microsoft.com/office/drawing/2014/main" id="{7C35573D-1BED-3900-56C8-63ACF555BA7C}"/>
+                <a16:creationId xmlns:a16="http://schemas.microsoft.com/office/drawing/2014/main" id="{08F911D8-5394-15B7-D1BD-B91F0411ADF0}"/>
               </a:ext>
             </a:extLst>
           </p:cNvPr>
@@ -9713,7 +9713,7 @@
                     <p:ext uri="{3AFAAA56-56D3-431D-BCD4-E75A35582382}">
                       <p173:tracksInfo xmlns:p173="http://schemas.microsoft.com/office/powerpoint/2017/3/main" displayLoc="slide">
                         <p173:trackLst>
-                          <p173:track id="{2CF4A443-B1B5-4646-9779-430205E5EE85}" label="English (captions)" lang="en-US" r:embed="rId7"/>
+                          <p173:track id="{50B51B29-2814-4D21-AED8-C25F14CB9825}" label="English (captions)" lang="en-US" r:embed="rId7"/>
                         </p173:trackLst>
                       </p173:tracksInfo>
                     </p:ext>
@@ -10976,7 +10976,7 @@
             <a:hlinkClick r:id="" action="ppaction://media"/>
             <a:extLst>
               <a:ext uri="{FF2B5EF4-FFF2-40B4-BE49-F238E27FC236}">
-                <a16:creationId xmlns:a16="http://schemas.microsoft.com/office/drawing/2014/main" id="{38FF52FD-66B6-B5CA-2DDA-826887F88C57}"/>
+                <a16:creationId xmlns:a16="http://schemas.microsoft.com/office/drawing/2014/main" id="{C4DB8602-DC00-3E50-8317-ABAD2E3B989B}"/>
               </a:ext>
             </a:extLst>
           </p:cNvPr>
@@ -10992,7 +10992,7 @@
                     <p:ext uri="{3AFAAA56-56D3-431D-BCD4-E75A35582382}">
                       <p173:tracksInfo xmlns:p173="http://schemas.microsoft.com/office/powerpoint/2017/3/main" displayLoc="slide">
                         <p173:trackLst>
-                          <p173:track id="{E2F4AAB9-0D80-4081-BE1F-FF5A0A33EDE8}" label="English (captions)" lang="en-US" r:embed="rId10"/>
+                          <p173:track id="{B42276AB-B4EB-45A3-AA25-8311ED5C0FCA}" label="English (captions)" lang="en-US" r:embed="rId10"/>
                         </p173:trackLst>
                       </p173:tracksInfo>
                     </p:ext>
@@ -12208,7 +12208,7 @@
             <a:hlinkClick r:id="" action="ppaction://media"/>
             <a:extLst>
               <a:ext uri="{FF2B5EF4-FFF2-40B4-BE49-F238E27FC236}">
-                <a16:creationId xmlns:a16="http://schemas.microsoft.com/office/drawing/2014/main" id="{EB6CB383-2491-E5C7-F0D0-60C8AB32F367}"/>
+                <a16:creationId xmlns:a16="http://schemas.microsoft.com/office/drawing/2014/main" id="{17CAA471-91AB-7387-7CBB-D729FE31C055}"/>
               </a:ext>
             </a:extLst>
           </p:cNvPr>
@@ -12224,7 +12224,7 @@
                     <p:ext uri="{3AFAAA56-56D3-431D-BCD4-E75A35582382}">
                       <p173:tracksInfo xmlns:p173="http://schemas.microsoft.com/office/powerpoint/2017/3/main" displayLoc="slide">
                         <p173:trackLst>
-                          <p173:track id="{C56C4BD2-7F77-42A7-9760-E6486E5FC4B3}" label="English (captions)" lang="en-US" r:embed="rId7"/>
+                          <p173:track id="{97B749CB-B30C-417A-A1DD-925DC6708D35}" label="English (captions)" lang="en-US" r:embed="rId7"/>
                         </p173:trackLst>
                       </p173:tracksInfo>
                     </p:ext>
@@ -14586,7 +14586,7 @@
             <a:hlinkClick r:id="" action="ppaction://media"/>
             <a:extLst>
               <a:ext uri="{FF2B5EF4-FFF2-40B4-BE49-F238E27FC236}">
-                <a16:creationId xmlns:a16="http://schemas.microsoft.com/office/drawing/2014/main" id="{01E5EF90-DA6F-CFF7-33BD-AAC2EE9EEEAD}"/>
+                <a16:creationId xmlns:a16="http://schemas.microsoft.com/office/drawing/2014/main" id="{13FD4F27-FBF5-E7BD-5532-626417B8BEE4}"/>
               </a:ext>
             </a:extLst>
           </p:cNvPr>
@@ -14602,7 +14602,7 @@
                     <p:ext uri="{3AFAAA56-56D3-431D-BCD4-E75A35582382}">
                       <p173:tracksInfo xmlns:p173="http://schemas.microsoft.com/office/powerpoint/2017/3/main" displayLoc="slide">
                         <p173:trackLst>
-                          <p173:track id="{3B363AD3-29F2-4024-A58F-B0E12B8AA278}" label="English (captions)" lang="en-US" r:embed="rId8"/>
+                          <p173:track id="{37055383-4015-42CF-8784-76D6C032126C}" label="English (captions)" lang="en-US" r:embed="rId8"/>
                         </p173:trackLst>
                       </p173:tracksInfo>
                     </p:ext>

--- a/presentations/b05-devices/B05_Devices_Narrated.pptx
+++ b/presentations/b05-devices/B05_Devices_Narrated.pptx
@@ -181,7 +181,7 @@
     </p:spTree>
     <p:extLst>
       <p:ext uri="{BB962C8B-B14F-4D97-AF65-F5344CB8AC3E}">
-        <p14:creationId xmlns:p14="http://schemas.microsoft.com/office/powerpoint/2010/main" val="4275907371"/>
+        <p14:creationId xmlns:p14="http://schemas.microsoft.com/office/powerpoint/2010/main" val="3681895898"/>
       </p:ext>
     </p:extLst>
   </p:cSld>
@@ -2250,7 +2250,7 @@
             <a:hlinkClick r:id="" action="ppaction://media"/>
             <a:extLst>
               <a:ext uri="{FF2B5EF4-FFF2-40B4-BE49-F238E27FC236}">
-                <a16:creationId xmlns:a16="http://schemas.microsoft.com/office/drawing/2014/main" id="{B126D950-79F9-A77D-25A4-EAA0C1F561C3}"/>
+                <a16:creationId xmlns:a16="http://schemas.microsoft.com/office/drawing/2014/main" id="{F08D05D5-05FD-77D8-8AFF-FD2D092B9AF1}"/>
               </a:ext>
             </a:extLst>
           </p:cNvPr>
@@ -2266,7 +2266,7 @@
                     <p:ext uri="{3AFAAA56-56D3-431D-BCD4-E75A35582382}">
                       <p173:tracksInfo xmlns:p173="http://schemas.microsoft.com/office/powerpoint/2017/3/main" displayLoc="slide">
                         <p173:trackLst>
-                          <p173:track id="{B0C420A0-B981-4A7F-BA2A-0BFDADA41D92}" label="English (captions)" lang="en-US" r:embed="rId6"/>
+                          <p173:track id="{6BBAA243-7F62-4CAF-BE73-FBC53BB39230}" label="English (captions)" lang="en-US" r:embed="rId6"/>
                         </p173:trackLst>
                       </p173:tracksInfo>
                     </p:ext>
@@ -3256,7 +3256,7 @@
             <a:hlinkClick r:id="" action="ppaction://media"/>
             <a:extLst>
               <a:ext uri="{FF2B5EF4-FFF2-40B4-BE49-F238E27FC236}">
-                <a16:creationId xmlns:a16="http://schemas.microsoft.com/office/drawing/2014/main" id="{F191D7F6-FFC5-252E-0C7A-10E1CC2DE66B}"/>
+                <a16:creationId xmlns:a16="http://schemas.microsoft.com/office/drawing/2014/main" id="{3E66BD38-4E37-6024-ACDD-B48AC73399C4}"/>
               </a:ext>
             </a:extLst>
           </p:cNvPr>
@@ -3272,7 +3272,7 @@
                     <p:ext uri="{3AFAAA56-56D3-431D-BCD4-E75A35582382}">
                       <p173:tracksInfo xmlns:p173="http://schemas.microsoft.com/office/powerpoint/2017/3/main" displayLoc="slide">
                         <p173:trackLst>
-                          <p173:track id="{D79B27B3-C779-45FF-8D65-DAFCA1189DD5}" label="English (captions)" lang="en-US" r:embed="rId10"/>
+                          <p173:track id="{8539BD44-93A2-4F4B-B1BC-F3E833D12185}" label="English (captions)" lang="en-US" r:embed="rId10"/>
                         </p173:trackLst>
                       </p173:tracksInfo>
                     </p:ext>
@@ -4089,7 +4089,7 @@
             <a:hlinkClick r:id="" action="ppaction://media"/>
             <a:extLst>
               <a:ext uri="{FF2B5EF4-FFF2-40B4-BE49-F238E27FC236}">
-                <a16:creationId xmlns:a16="http://schemas.microsoft.com/office/drawing/2014/main" id="{FF6EE846-0EB1-D80C-278F-96BAAE1364B3}"/>
+                <a16:creationId xmlns:a16="http://schemas.microsoft.com/office/drawing/2014/main" id="{D3FD885B-6387-21DF-281C-E8D3BB0013FB}"/>
               </a:ext>
             </a:extLst>
           </p:cNvPr>
@@ -4105,7 +4105,7 @@
                     <p:ext uri="{3AFAAA56-56D3-431D-BCD4-E75A35582382}">
                       <p173:tracksInfo xmlns:p173="http://schemas.microsoft.com/office/powerpoint/2017/3/main" displayLoc="slide">
                         <p173:trackLst>
-                          <p173:track id="{5D70EB51-9D7A-442B-8968-FC5CB82C7DA4}" label="English (captions)" lang="en-US" r:embed="rId8"/>
+                          <p173:track id="{892A01A6-2555-4D3C-B15E-E7BD630533C7}" label="English (captions)" lang="en-US" r:embed="rId8"/>
                         </p173:trackLst>
                       </p173:tracksInfo>
                     </p:ext>
@@ -4138,10 +4138,10 @@
   </p:clrMapOvr>
   <mc:AlternateContent xmlns:mc="http://schemas.openxmlformats.org/markup-compatibility/2006">
     <mc:Choice xmlns:p14="http://schemas.microsoft.com/office/powerpoint/2010/main" Requires="p14">
-      <p:transition spd="slow" p14:dur="2000" advTm="76310"/>
+      <p:transition spd="slow" p14:dur="2000" advTm="78260"/>
     </mc:Choice>
     <mc:Fallback>
-      <p:transition spd="slow" advTm="76310"/>
+      <p:transition spd="slow" advTm="78260"/>
     </mc:Fallback>
   </mc:AlternateContent>
   <p:timing>
@@ -4175,7 +4175,7 @@
                                   <p:childTnLst>
                                     <p:cmd type="call" cmd="playFrom(0.0)">
                                       <p:cBhvr>
-                                        <p:cTn id="6" dur="75312" fill="hold"/>
+                                        <p:cTn id="6" dur="77256" fill="hold"/>
                                         <p:tgtEl>
                                           <p:spTgt spid="16"/>
                                         </p:tgtEl>
@@ -5280,7 +5280,7 @@
             <a:hlinkClick r:id="" action="ppaction://media"/>
             <a:extLst>
               <a:ext uri="{FF2B5EF4-FFF2-40B4-BE49-F238E27FC236}">
-                <a16:creationId xmlns:a16="http://schemas.microsoft.com/office/drawing/2014/main" id="{1302F32E-9248-AA00-0A2D-77A28473AA99}"/>
+                <a16:creationId xmlns:a16="http://schemas.microsoft.com/office/drawing/2014/main" id="{DF9EFFD5-7FF6-145D-AA68-EA042902ABCC}"/>
               </a:ext>
             </a:extLst>
           </p:cNvPr>
@@ -5296,7 +5296,7 @@
                     <p:ext uri="{3AFAAA56-56D3-431D-BCD4-E75A35582382}">
                       <p173:tracksInfo xmlns:p173="http://schemas.microsoft.com/office/powerpoint/2017/3/main" displayLoc="slide">
                         <p173:trackLst>
-                          <p173:track id="{C5F946B9-E31F-491F-9F13-B4C4B3E8B9F1}" label="English (captions)" lang="en-US" r:embed="rId8"/>
+                          <p173:track id="{55E8607A-905F-41E1-96FF-3B15C5AF7B9A}" label="English (captions)" lang="en-US" r:embed="rId8"/>
                         </p173:trackLst>
                       </p173:tracksInfo>
                     </p:ext>
@@ -6597,7 +6597,7 @@
             <a:hlinkClick r:id="" action="ppaction://media"/>
             <a:extLst>
               <a:ext uri="{FF2B5EF4-FFF2-40B4-BE49-F238E27FC236}">
-                <a16:creationId xmlns:a16="http://schemas.microsoft.com/office/drawing/2014/main" id="{1AC273C4-BE06-C1C2-FA53-FCF13BFC6C50}"/>
+                <a16:creationId xmlns:a16="http://schemas.microsoft.com/office/drawing/2014/main" id="{D4BC447C-2D6D-08E9-FADB-AF7C0A52B0A8}"/>
               </a:ext>
             </a:extLst>
           </p:cNvPr>
@@ -6613,7 +6613,7 @@
                     <p:ext uri="{3AFAAA56-56D3-431D-BCD4-E75A35582382}">
                       <p173:tracksInfo xmlns:p173="http://schemas.microsoft.com/office/powerpoint/2017/3/main" displayLoc="slide">
                         <p173:trackLst>
-                          <p173:track id="{2283014B-5C6E-47F3-96F2-79C5DA5938CC}" label="English (captions)" lang="en-US" r:embed="rId8"/>
+                          <p173:track id="{FDB1AEEF-4520-497B-9897-8E459EDE5DCB}" label="English (captions)" lang="en-US" r:embed="rId8"/>
                         </p173:trackLst>
                       </p173:tracksInfo>
                     </p:ext>
@@ -7728,7 +7728,7 @@
             <a:hlinkClick r:id="" action="ppaction://media"/>
             <a:extLst>
               <a:ext uri="{FF2B5EF4-FFF2-40B4-BE49-F238E27FC236}">
-                <a16:creationId xmlns:a16="http://schemas.microsoft.com/office/drawing/2014/main" id="{B1031B07-4018-F664-7C9A-477EFC2AAAB2}"/>
+                <a16:creationId xmlns:a16="http://schemas.microsoft.com/office/drawing/2014/main" id="{F1D6F902-3AA4-C7A6-D215-48A5ECA49A47}"/>
               </a:ext>
             </a:extLst>
           </p:cNvPr>
@@ -7744,7 +7744,7 @@
                     <p:ext uri="{3AFAAA56-56D3-431D-BCD4-E75A35582382}">
                       <p173:tracksInfo xmlns:p173="http://schemas.microsoft.com/office/powerpoint/2017/3/main" displayLoc="slide">
                         <p173:trackLst>
-                          <p173:track id="{B218501F-99DF-4BD9-8A02-96EF42E4E03E}" label="English (captions)" lang="en-US" r:embed="rId10"/>
+                          <p173:track id="{3C3FB4E6-18B1-453F-8E01-30F4FA894544}" label="English (captions)" lang="en-US" r:embed="rId10"/>
                         </p173:trackLst>
                       </p173:tracksInfo>
                     </p:ext>
@@ -8811,7 +8811,7 @@
             <a:hlinkClick r:id="" action="ppaction://media"/>
             <a:extLst>
               <a:ext uri="{FF2B5EF4-FFF2-40B4-BE49-F238E27FC236}">
-                <a16:creationId xmlns:a16="http://schemas.microsoft.com/office/drawing/2014/main" id="{4E599C59-A347-EEAD-3529-A39D46DE64A8}"/>
+                <a16:creationId xmlns:a16="http://schemas.microsoft.com/office/drawing/2014/main" id="{3CBDE244-7C52-5E9F-578C-08F3F40D0B67}"/>
               </a:ext>
             </a:extLst>
           </p:cNvPr>
@@ -8827,7 +8827,7 @@
                     <p:ext uri="{3AFAAA56-56D3-431D-BCD4-E75A35582382}">
                       <p173:tracksInfo xmlns:p173="http://schemas.microsoft.com/office/powerpoint/2017/3/main" displayLoc="slide">
                         <p173:trackLst>
-                          <p173:track id="{FBB01966-1F86-4DD4-9D99-5B85563B44A2}" label="English (captions)" lang="en-US" r:embed="rId8"/>
+                          <p173:track id="{60016225-8540-4CA6-9014-0E46F23A00EC}" label="English (captions)" lang="en-US" r:embed="rId8"/>
                         </p173:trackLst>
                       </p173:tracksInfo>
                     </p:ext>
@@ -9697,7 +9697,7 @@
             <a:hlinkClick r:id="" action="ppaction://media"/>
             <a:extLst>
               <a:ext uri="{FF2B5EF4-FFF2-40B4-BE49-F238E27FC236}">
-                <a16:creationId xmlns:a16="http://schemas.microsoft.com/office/drawing/2014/main" id="{08F911D8-5394-15B7-D1BD-B91F0411ADF0}"/>
+                <a16:creationId xmlns:a16="http://schemas.microsoft.com/office/drawing/2014/main" id="{FDA4A264-350E-0F6E-547F-847E6F3DBC4E}"/>
               </a:ext>
             </a:extLst>
           </p:cNvPr>
@@ -9713,7 +9713,7 @@
                     <p:ext uri="{3AFAAA56-56D3-431D-BCD4-E75A35582382}">
                       <p173:tracksInfo xmlns:p173="http://schemas.microsoft.com/office/powerpoint/2017/3/main" displayLoc="slide">
                         <p173:trackLst>
-                          <p173:track id="{50B51B29-2814-4D21-AED8-C25F14CB9825}" label="English (captions)" lang="en-US" r:embed="rId7"/>
+                          <p173:track id="{C7530744-DA7F-453D-8F44-611240E89DAC}" label="English (captions)" lang="en-US" r:embed="rId7"/>
                         </p173:trackLst>
                       </p173:tracksInfo>
                     </p:ext>
@@ -10976,7 +10976,7 @@
             <a:hlinkClick r:id="" action="ppaction://media"/>
             <a:extLst>
               <a:ext uri="{FF2B5EF4-FFF2-40B4-BE49-F238E27FC236}">
-                <a16:creationId xmlns:a16="http://schemas.microsoft.com/office/drawing/2014/main" id="{C4DB8602-DC00-3E50-8317-ABAD2E3B989B}"/>
+                <a16:creationId xmlns:a16="http://schemas.microsoft.com/office/drawing/2014/main" id="{5B50492A-9C7B-E41B-68AC-13FC4F27D5C0}"/>
               </a:ext>
             </a:extLst>
           </p:cNvPr>
@@ -10992,7 +10992,7 @@
                     <p:ext uri="{3AFAAA56-56D3-431D-BCD4-E75A35582382}">
                       <p173:tracksInfo xmlns:p173="http://schemas.microsoft.com/office/powerpoint/2017/3/main" displayLoc="slide">
                         <p173:trackLst>
-                          <p173:track id="{B42276AB-B4EB-45A3-AA25-8311ED5C0FCA}" label="English (captions)" lang="en-US" r:embed="rId10"/>
+                          <p173:track id="{9BEC6B1E-3036-481C-95CC-1EA151025641}" label="English (captions)" lang="en-US" r:embed="rId10"/>
                         </p173:trackLst>
                       </p173:tracksInfo>
                     </p:ext>
@@ -12208,7 +12208,7 @@
             <a:hlinkClick r:id="" action="ppaction://media"/>
             <a:extLst>
               <a:ext uri="{FF2B5EF4-FFF2-40B4-BE49-F238E27FC236}">
-                <a16:creationId xmlns:a16="http://schemas.microsoft.com/office/drawing/2014/main" id="{17CAA471-91AB-7387-7CBB-D729FE31C055}"/>
+                <a16:creationId xmlns:a16="http://schemas.microsoft.com/office/drawing/2014/main" id="{1BE12BDC-4ECC-697F-C159-3B8DDC1ABB6C}"/>
               </a:ext>
             </a:extLst>
           </p:cNvPr>
@@ -12224,7 +12224,7 @@
                     <p:ext uri="{3AFAAA56-56D3-431D-BCD4-E75A35582382}">
                       <p173:tracksInfo xmlns:p173="http://schemas.microsoft.com/office/powerpoint/2017/3/main" displayLoc="slide">
                         <p173:trackLst>
-                          <p173:track id="{97B749CB-B30C-417A-A1DD-925DC6708D35}" label="English (captions)" lang="en-US" r:embed="rId7"/>
+                          <p173:track id="{636414A8-CBDC-4F8F-8210-6C7EB2A4F48F}" label="English (captions)" lang="en-US" r:embed="rId7"/>
                         </p173:trackLst>
                       </p173:tracksInfo>
                     </p:ext>
@@ -14586,7 +14586,7 @@
             <a:hlinkClick r:id="" action="ppaction://media"/>
             <a:extLst>
               <a:ext uri="{FF2B5EF4-FFF2-40B4-BE49-F238E27FC236}">
-                <a16:creationId xmlns:a16="http://schemas.microsoft.com/office/drawing/2014/main" id="{13FD4F27-FBF5-E7BD-5532-626417B8BEE4}"/>
+                <a16:creationId xmlns:a16="http://schemas.microsoft.com/office/drawing/2014/main" id="{6CC93BAB-4153-F497-360D-C8DC22DFFF80}"/>
               </a:ext>
             </a:extLst>
           </p:cNvPr>
@@ -14602,7 +14602,7 @@
                     <p:ext uri="{3AFAAA56-56D3-431D-BCD4-E75A35582382}">
                       <p173:tracksInfo xmlns:p173="http://schemas.microsoft.com/office/powerpoint/2017/3/main" displayLoc="slide">
                         <p173:trackLst>
-                          <p173:track id="{37055383-4015-42CF-8784-76D6C032126C}" label="English (captions)" lang="en-US" r:embed="rId8"/>
+                          <p173:track id="{071DA945-5473-4F14-B437-D49FD7585CD2}" label="English (captions)" lang="en-US" r:embed="rId8"/>
                         </p173:trackLst>
                       </p173:tracksInfo>
                     </p:ext>

--- a/presentations/b05-devices/B05_Devices_Narrated.pptx
+++ b/presentations/b05-devices/B05_Devices_Narrated.pptx
@@ -181,7 +181,7 @@
     </p:spTree>
     <p:extLst>
       <p:ext uri="{BB962C8B-B14F-4D97-AF65-F5344CB8AC3E}">
-        <p14:creationId xmlns:p14="http://schemas.microsoft.com/office/powerpoint/2010/main" val="3681895898"/>
+        <p14:creationId xmlns:p14="http://schemas.microsoft.com/office/powerpoint/2010/main" val="1571423928"/>
       </p:ext>
     </p:extLst>
   </p:cSld>
@@ -2250,7 +2250,7 @@
             <a:hlinkClick r:id="" action="ppaction://media"/>
             <a:extLst>
               <a:ext uri="{FF2B5EF4-FFF2-40B4-BE49-F238E27FC236}">
-                <a16:creationId xmlns:a16="http://schemas.microsoft.com/office/drawing/2014/main" id="{F08D05D5-05FD-77D8-8AFF-FD2D092B9AF1}"/>
+                <a16:creationId xmlns:a16="http://schemas.microsoft.com/office/drawing/2014/main" id="{5956021A-D2F8-613B-5C0F-22B5C32EF0DE}"/>
               </a:ext>
             </a:extLst>
           </p:cNvPr>
@@ -2266,7 +2266,7 @@
                     <p:ext uri="{3AFAAA56-56D3-431D-BCD4-E75A35582382}">
                       <p173:tracksInfo xmlns:p173="http://schemas.microsoft.com/office/powerpoint/2017/3/main" displayLoc="slide">
                         <p173:trackLst>
-                          <p173:track id="{6BBAA243-7F62-4CAF-BE73-FBC53BB39230}" label="English (captions)" lang="en-US" r:embed="rId6"/>
+                          <p173:track id="{8747EF83-EE58-4614-8DB5-05C1B1C0C864}" label="English (captions)" lang="en-US" r:embed="rId6"/>
                         </p173:trackLst>
                       </p173:tracksInfo>
                     </p:ext>
@@ -2299,10 +2299,10 @@
   </p:clrMapOvr>
   <mc:AlternateContent xmlns:mc="http://schemas.openxmlformats.org/markup-compatibility/2006">
     <mc:Choice xmlns:p14="http://schemas.microsoft.com/office/powerpoint/2010/main" Requires="p14">
-      <p:transition spd="slow" p14:dur="2000" advTm="28840"/>
+      <p:transition spd="slow" p14:dur="2000" advTm="45640"/>
     </mc:Choice>
     <mc:Fallback>
-      <p:transition spd="slow" advTm="28840"/>
+      <p:transition spd="slow" advTm="45640"/>
     </mc:Fallback>
   </mc:AlternateContent>
   <p:timing>
@@ -2336,7 +2336,7 @@
                                   <p:childTnLst>
                                     <p:cmd type="call" cmd="playFrom(0.0)">
                                       <p:cBhvr>
-                                        <p:cTn id="6" dur="27840" fill="hold"/>
+                                        <p:cTn id="6" dur="41640" fill="hold"/>
                                         <p:tgtEl>
                                           <p:spTgt spid="8"/>
                                         </p:tgtEl>
@@ -3256,7 +3256,7 @@
             <a:hlinkClick r:id="" action="ppaction://media"/>
             <a:extLst>
               <a:ext uri="{FF2B5EF4-FFF2-40B4-BE49-F238E27FC236}">
-                <a16:creationId xmlns:a16="http://schemas.microsoft.com/office/drawing/2014/main" id="{3E66BD38-4E37-6024-ACDD-B48AC73399C4}"/>
+                <a16:creationId xmlns:a16="http://schemas.microsoft.com/office/drawing/2014/main" id="{598EB3F2-A911-EB8B-9199-3B412059B0FB}"/>
               </a:ext>
             </a:extLst>
           </p:cNvPr>
@@ -3272,7 +3272,7 @@
                     <p:ext uri="{3AFAAA56-56D3-431D-BCD4-E75A35582382}">
                       <p173:tracksInfo xmlns:p173="http://schemas.microsoft.com/office/powerpoint/2017/3/main" displayLoc="slide">
                         <p173:trackLst>
-                          <p173:track id="{8539BD44-93A2-4F4B-B1BC-F3E833D12185}" label="English (captions)" lang="en-US" r:embed="rId10"/>
+                          <p173:track id="{555E0E26-D50F-4A85-874D-0AFDD36582F9}" label="English (captions)" lang="en-US" r:embed="rId10"/>
                         </p173:trackLst>
                       </p173:tracksInfo>
                     </p:ext>
@@ -3305,10 +3305,10 @@
   </p:clrMapOvr>
   <mc:AlternateContent xmlns:mc="http://schemas.openxmlformats.org/markup-compatibility/2006">
     <mc:Choice xmlns:p14="http://schemas.microsoft.com/office/powerpoint/2010/main" Requires="p14">
-      <p:transition spd="slow" p14:dur="2000" advTm="55120"/>
+      <p:transition spd="slow" p14:dur="2000" advTm="57520"/>
     </mc:Choice>
     <mc:Fallback>
-      <p:transition spd="slow" advTm="55120"/>
+      <p:transition spd="slow" advTm="57520"/>
     </mc:Fallback>
   </mc:AlternateContent>
   <p:timing>
@@ -3342,7 +3342,7 @@
                                   <p:childTnLst>
                                     <p:cmd type="call" cmd="playFrom(0.0)">
                                       <p:cBhvr>
-                                        <p:cTn id="6" dur="54120" fill="hold"/>
+                                        <p:cTn id="6" dur="53520" fill="hold"/>
                                         <p:tgtEl>
                                           <p:spTgt spid="23"/>
                                         </p:tgtEl>
@@ -4089,7 +4089,7 @@
             <a:hlinkClick r:id="" action="ppaction://media"/>
             <a:extLst>
               <a:ext uri="{FF2B5EF4-FFF2-40B4-BE49-F238E27FC236}">
-                <a16:creationId xmlns:a16="http://schemas.microsoft.com/office/drawing/2014/main" id="{D3FD885B-6387-21DF-281C-E8D3BB0013FB}"/>
+                <a16:creationId xmlns:a16="http://schemas.microsoft.com/office/drawing/2014/main" id="{5C241971-EBD2-BF5B-E1F5-08B0A2874D36}"/>
               </a:ext>
             </a:extLst>
           </p:cNvPr>
@@ -4105,7 +4105,7 @@
                     <p:ext uri="{3AFAAA56-56D3-431D-BCD4-E75A35582382}">
                       <p173:tracksInfo xmlns:p173="http://schemas.microsoft.com/office/powerpoint/2017/3/main" displayLoc="slide">
                         <p173:trackLst>
-                          <p173:track id="{892A01A6-2555-4D3C-B15E-E7BD630533C7}" label="English (captions)" lang="en-US" r:embed="rId8"/>
+                          <p173:track id="{2F47293D-01AF-4773-8476-C545C2756971}" label="English (captions)" lang="en-US" r:embed="rId8"/>
                         </p173:trackLst>
                       </p173:tracksInfo>
                     </p:ext>
@@ -4138,10 +4138,10 @@
   </p:clrMapOvr>
   <mc:AlternateContent xmlns:mc="http://schemas.openxmlformats.org/markup-compatibility/2006">
     <mc:Choice xmlns:p14="http://schemas.microsoft.com/office/powerpoint/2010/main" Requires="p14">
-      <p:transition spd="slow" p14:dur="2000" advTm="78260"/>
+      <p:transition spd="slow" p14:dur="2000" advTm="62750"/>
     </mc:Choice>
     <mc:Fallback>
-      <p:transition spd="slow" advTm="78260"/>
+      <p:transition spd="slow" advTm="62750"/>
     </mc:Fallback>
   </mc:AlternateContent>
   <p:timing>
@@ -4175,7 +4175,7 @@
                                   <p:childTnLst>
                                     <p:cmd type="call" cmd="playFrom(0.0)">
                                       <p:cBhvr>
-                                        <p:cTn id="6" dur="77256" fill="hold"/>
+                                        <p:cTn id="6" dur="58752" fill="hold"/>
                                         <p:tgtEl>
                                           <p:spTgt spid="16"/>
                                         </p:tgtEl>
@@ -5280,7 +5280,7 @@
             <a:hlinkClick r:id="" action="ppaction://media"/>
             <a:extLst>
               <a:ext uri="{FF2B5EF4-FFF2-40B4-BE49-F238E27FC236}">
-                <a16:creationId xmlns:a16="http://schemas.microsoft.com/office/drawing/2014/main" id="{DF9EFFD5-7FF6-145D-AA68-EA042902ABCC}"/>
+                <a16:creationId xmlns:a16="http://schemas.microsoft.com/office/drawing/2014/main" id="{47C95284-ABE7-C4D8-D3BE-B8A774966FAB}"/>
               </a:ext>
             </a:extLst>
           </p:cNvPr>
@@ -5296,7 +5296,7 @@
                     <p:ext uri="{3AFAAA56-56D3-431D-BCD4-E75A35582382}">
                       <p173:tracksInfo xmlns:p173="http://schemas.microsoft.com/office/powerpoint/2017/3/main" displayLoc="slide">
                         <p173:trackLst>
-                          <p173:track id="{55E8607A-905F-41E1-96FF-3B15C5AF7B9A}" label="English (captions)" lang="en-US" r:embed="rId8"/>
+                          <p173:track id="{7AFAC944-2448-48F6-966B-A4E0A7186A8D}" label="English (captions)" lang="en-US" r:embed="rId8"/>
                         </p173:trackLst>
                       </p173:tracksInfo>
                     </p:ext>
@@ -5329,10 +5329,10 @@
   </p:clrMapOvr>
   <mc:AlternateContent xmlns:mc="http://schemas.openxmlformats.org/markup-compatibility/2006">
     <mc:Choice xmlns:p14="http://schemas.microsoft.com/office/powerpoint/2010/main" Requires="p14">
-      <p:transition spd="slow" p14:dur="2000" advTm="74180"/>
+      <p:transition spd="slow" p14:dur="2000" advTm="55700"/>
     </mc:Choice>
     <mc:Fallback>
-      <p:transition spd="slow" advTm="74180"/>
+      <p:transition spd="slow" advTm="55700"/>
     </mc:Fallback>
   </mc:AlternateContent>
   <p:timing>
@@ -5366,7 +5366,7 @@
                                   <p:childTnLst>
                                     <p:cmd type="call" cmd="playFrom(0.0)">
                                       <p:cBhvr>
-                                        <p:cTn id="6" dur="73176" fill="hold"/>
+                                        <p:cTn id="6" dur="51696" fill="hold"/>
                                         <p:tgtEl>
                                           <p:spTgt spid="27"/>
                                         </p:tgtEl>
@@ -6597,7 +6597,7 @@
             <a:hlinkClick r:id="" action="ppaction://media"/>
             <a:extLst>
               <a:ext uri="{FF2B5EF4-FFF2-40B4-BE49-F238E27FC236}">
-                <a16:creationId xmlns:a16="http://schemas.microsoft.com/office/drawing/2014/main" id="{D4BC447C-2D6D-08E9-FADB-AF7C0A52B0A8}"/>
+                <a16:creationId xmlns:a16="http://schemas.microsoft.com/office/drawing/2014/main" id="{353E31C1-0829-995C-8475-DEC01F776CA9}"/>
               </a:ext>
             </a:extLst>
           </p:cNvPr>
@@ -6613,7 +6613,7 @@
                     <p:ext uri="{3AFAAA56-56D3-431D-BCD4-E75A35582382}">
                       <p173:tracksInfo xmlns:p173="http://schemas.microsoft.com/office/powerpoint/2017/3/main" displayLoc="slide">
                         <p173:trackLst>
-                          <p173:track id="{FDB1AEEF-4520-497B-9897-8E459EDE5DCB}" label="English (captions)" lang="en-US" r:embed="rId8"/>
+                          <p173:track id="{A266FBE1-92BF-477E-B214-4205A51DF911}" label="English (captions)" lang="en-US" r:embed="rId8"/>
                         </p173:trackLst>
                       </p173:tracksInfo>
                     </p:ext>
@@ -6646,10 +6646,10 @@
   </p:clrMapOvr>
   <mc:AlternateContent xmlns:mc="http://schemas.openxmlformats.org/markup-compatibility/2006">
     <mc:Choice xmlns:p14="http://schemas.microsoft.com/office/powerpoint/2010/main" Requires="p14">
-      <p:transition spd="slow" p14:dur="2000" advTm="64170"/>
+      <p:transition spd="slow" p14:dur="2000" advTm="56680"/>
     </mc:Choice>
     <mc:Fallback>
-      <p:transition spd="slow" advTm="64170"/>
+      <p:transition spd="slow" advTm="56680"/>
     </mc:Fallback>
   </mc:AlternateContent>
   <p:timing>
@@ -6683,7 +6683,7 @@
                                   <p:childTnLst>
                                     <p:cmd type="call" cmd="playFrom(0.0)">
                                       <p:cBhvr>
-                                        <p:cTn id="6" dur="63168" fill="hold"/>
+                                        <p:cTn id="6" dur="52680" fill="hold"/>
                                         <p:tgtEl>
                                           <p:spTgt spid="16"/>
                                         </p:tgtEl>
@@ -7728,7 +7728,7 @@
             <a:hlinkClick r:id="" action="ppaction://media"/>
             <a:extLst>
               <a:ext uri="{FF2B5EF4-FFF2-40B4-BE49-F238E27FC236}">
-                <a16:creationId xmlns:a16="http://schemas.microsoft.com/office/drawing/2014/main" id="{F1D6F902-3AA4-C7A6-D215-48A5ECA49A47}"/>
+                <a16:creationId xmlns:a16="http://schemas.microsoft.com/office/drawing/2014/main" id="{7B961008-B174-BB25-A8EC-632D7286D1E1}"/>
               </a:ext>
             </a:extLst>
           </p:cNvPr>
@@ -7744,7 +7744,7 @@
                     <p:ext uri="{3AFAAA56-56D3-431D-BCD4-E75A35582382}">
                       <p173:tracksInfo xmlns:p173="http://schemas.microsoft.com/office/powerpoint/2017/3/main" displayLoc="slide">
                         <p173:trackLst>
-                          <p173:track id="{3C3FB4E6-18B1-453F-8E01-30F4FA894544}" label="English (captions)" lang="en-US" r:embed="rId10"/>
+                          <p173:track id="{BC2404AA-80D7-4076-8C45-D72FFC82E87A}" label="English (captions)" lang="en-US" r:embed="rId10"/>
                         </p173:trackLst>
                       </p173:tracksInfo>
                     </p:ext>
@@ -7777,10 +7777,10 @@
   </p:clrMapOvr>
   <mc:AlternateContent xmlns:mc="http://schemas.openxmlformats.org/markup-compatibility/2006">
     <mc:Choice xmlns:p14="http://schemas.microsoft.com/office/powerpoint/2010/main" Requires="p14">
-      <p:transition spd="slow" p14:dur="2000" advTm="66350"/>
+      <p:transition spd="slow" p14:dur="2000" advTm="56900"/>
     </mc:Choice>
     <mc:Fallback>
-      <p:transition spd="slow" advTm="66350"/>
+      <p:transition spd="slow" advTm="56900"/>
     </mc:Fallback>
   </mc:AlternateContent>
   <p:timing>
@@ -7814,7 +7814,7 @@
                                   <p:childTnLst>
                                     <p:cmd type="call" cmd="playFrom(0.0)">
                                       <p:cBhvr>
-                                        <p:cTn id="6" dur="65352" fill="hold"/>
+                                        <p:cTn id="6" dur="52896" fill="hold"/>
                                         <p:tgtEl>
                                           <p:spTgt spid="26"/>
                                         </p:tgtEl>
@@ -8811,7 +8811,7 @@
             <a:hlinkClick r:id="" action="ppaction://media"/>
             <a:extLst>
               <a:ext uri="{FF2B5EF4-FFF2-40B4-BE49-F238E27FC236}">
-                <a16:creationId xmlns:a16="http://schemas.microsoft.com/office/drawing/2014/main" id="{3CBDE244-7C52-5E9F-578C-08F3F40D0B67}"/>
+                <a16:creationId xmlns:a16="http://schemas.microsoft.com/office/drawing/2014/main" id="{B585996E-C7B4-D3DA-F94D-D648592EFBA5}"/>
               </a:ext>
             </a:extLst>
           </p:cNvPr>
@@ -8827,7 +8827,7 @@
                     <p:ext uri="{3AFAAA56-56D3-431D-BCD4-E75A35582382}">
                       <p173:tracksInfo xmlns:p173="http://schemas.microsoft.com/office/powerpoint/2017/3/main" displayLoc="slide">
                         <p173:trackLst>
-                          <p173:track id="{60016225-8540-4CA6-9014-0E46F23A00EC}" label="English (captions)" lang="en-US" r:embed="rId8"/>
+                          <p173:track id="{18CEA464-E7FD-4792-B640-C7F716D02530}" label="English (captions)" lang="en-US" r:embed="rId8"/>
                         </p173:trackLst>
                       </p173:tracksInfo>
                     </p:ext>
@@ -8860,10 +8860,10 @@
   </p:clrMapOvr>
   <mc:AlternateContent xmlns:mc="http://schemas.openxmlformats.org/markup-compatibility/2006">
     <mc:Choice xmlns:p14="http://schemas.microsoft.com/office/powerpoint/2010/main" Requires="p14">
-      <p:transition spd="slow" p14:dur="2000" advTm="77730"/>
+      <p:transition spd="slow" p14:dur="2000" advTm="61960"/>
     </mc:Choice>
     <mc:Fallback>
-      <p:transition spd="slow" advTm="77730"/>
+      <p:transition spd="slow" advTm="61960"/>
     </mc:Fallback>
   </mc:AlternateContent>
   <p:timing>
@@ -8897,7 +8897,7 @@
                                   <p:childTnLst>
                                     <p:cmd type="call" cmd="playFrom(0.0)">
                                       <p:cBhvr>
-                                        <p:cTn id="6" dur="76728" fill="hold"/>
+                                        <p:cTn id="6" dur="57960" fill="hold"/>
                                         <p:tgtEl>
                                           <p:spTgt spid="26"/>
                                         </p:tgtEl>
@@ -9697,7 +9697,7 @@
             <a:hlinkClick r:id="" action="ppaction://media"/>
             <a:extLst>
               <a:ext uri="{FF2B5EF4-FFF2-40B4-BE49-F238E27FC236}">
-                <a16:creationId xmlns:a16="http://schemas.microsoft.com/office/drawing/2014/main" id="{FDA4A264-350E-0F6E-547F-847E6F3DBC4E}"/>
+                <a16:creationId xmlns:a16="http://schemas.microsoft.com/office/drawing/2014/main" id="{1291F08E-CEBF-5D0D-C233-432850EEBA55}"/>
               </a:ext>
             </a:extLst>
           </p:cNvPr>
@@ -9713,7 +9713,7 @@
                     <p:ext uri="{3AFAAA56-56D3-431D-BCD4-E75A35582382}">
                       <p173:tracksInfo xmlns:p173="http://schemas.microsoft.com/office/powerpoint/2017/3/main" displayLoc="slide">
                         <p173:trackLst>
-                          <p173:track id="{C7530744-DA7F-453D-8F44-611240E89DAC}" label="English (captions)" lang="en-US" r:embed="rId7"/>
+                          <p173:track id="{5C7E510E-92F4-4933-83E0-8D7BEBB4BE2E}" label="English (captions)" lang="en-US" r:embed="rId7"/>
                         </p173:trackLst>
                       </p173:tracksInfo>
                     </p:ext>
@@ -9746,10 +9746,10 @@
   </p:clrMapOvr>
   <mc:AlternateContent xmlns:mc="http://schemas.openxmlformats.org/markup-compatibility/2006">
     <mc:Choice xmlns:p14="http://schemas.microsoft.com/office/powerpoint/2010/main" Requires="p14">
-      <p:transition spd="slow" p14:dur="2000" advTm="61100"/>
+      <p:transition spd="slow" p14:dur="2000" advTm="56990"/>
     </mc:Choice>
     <mc:Fallback>
-      <p:transition spd="slow" advTm="61100"/>
+      <p:transition spd="slow" advTm="56990"/>
     </mc:Fallback>
   </mc:AlternateContent>
   <p:timing>
@@ -9783,7 +9783,7 @@
                                   <p:childTnLst>
                                     <p:cmd type="call" cmd="playFrom(0.0)">
                                       <p:cBhvr>
-                                        <p:cTn id="6" dur="60096" fill="hold"/>
+                                        <p:cTn id="6" dur="52992" fill="hold"/>
                                         <p:tgtEl>
                                           <p:spTgt spid="16"/>
                                         </p:tgtEl>
@@ -10976,7 +10976,7 @@
             <a:hlinkClick r:id="" action="ppaction://media"/>
             <a:extLst>
               <a:ext uri="{FF2B5EF4-FFF2-40B4-BE49-F238E27FC236}">
-                <a16:creationId xmlns:a16="http://schemas.microsoft.com/office/drawing/2014/main" id="{5B50492A-9C7B-E41B-68AC-13FC4F27D5C0}"/>
+                <a16:creationId xmlns:a16="http://schemas.microsoft.com/office/drawing/2014/main" id="{5D6CCD28-0EEC-9BBF-42BD-4EE04894EFD0}"/>
               </a:ext>
             </a:extLst>
           </p:cNvPr>
@@ -10992,7 +10992,7 @@
                     <p:ext uri="{3AFAAA56-56D3-431D-BCD4-E75A35582382}">
                       <p173:tracksInfo xmlns:p173="http://schemas.microsoft.com/office/powerpoint/2017/3/main" displayLoc="slide">
                         <p173:trackLst>
-                          <p173:track id="{9BEC6B1E-3036-481C-95CC-1EA151025641}" label="English (captions)" lang="en-US" r:embed="rId10"/>
+                          <p173:track id="{222C1BA0-C605-419C-A5B2-7AA866387580}" label="English (captions)" lang="en-US" r:embed="rId10"/>
                         </p173:trackLst>
                       </p173:tracksInfo>
                     </p:ext>
@@ -11025,10 +11025,10 @@
   </p:clrMapOvr>
   <mc:AlternateContent xmlns:mc="http://schemas.openxmlformats.org/markup-compatibility/2006">
     <mc:Choice xmlns:p14="http://schemas.microsoft.com/office/powerpoint/2010/main" Requires="p14">
-      <p:transition spd="slow" p14:dur="2000" advTm="63110"/>
+      <p:transition spd="slow" p14:dur="2000" advTm="61620"/>
     </mc:Choice>
     <mc:Fallback>
-      <p:transition spd="slow" advTm="63110"/>
+      <p:transition spd="slow" advTm="61620"/>
     </mc:Fallback>
   </mc:AlternateContent>
   <p:timing>
@@ -11062,7 +11062,7 @@
                                   <p:childTnLst>
                                     <p:cmd type="call" cmd="playFrom(0.0)">
                                       <p:cBhvr>
-                                        <p:cTn id="6" dur="62112" fill="hold"/>
+                                        <p:cTn id="6" dur="57624" fill="hold"/>
                                         <p:tgtEl>
                                           <p:spTgt spid="26"/>
                                         </p:tgtEl>
@@ -12208,7 +12208,7 @@
             <a:hlinkClick r:id="" action="ppaction://media"/>
             <a:extLst>
               <a:ext uri="{FF2B5EF4-FFF2-40B4-BE49-F238E27FC236}">
-                <a16:creationId xmlns:a16="http://schemas.microsoft.com/office/drawing/2014/main" id="{1BE12BDC-4ECC-697F-C159-3B8DDC1ABB6C}"/>
+                <a16:creationId xmlns:a16="http://schemas.microsoft.com/office/drawing/2014/main" id="{92D9F01C-CA7E-921E-95A0-EB5969AA53E4}"/>
               </a:ext>
             </a:extLst>
           </p:cNvPr>
@@ -12224,7 +12224,7 @@
                     <p:ext uri="{3AFAAA56-56D3-431D-BCD4-E75A35582382}">
                       <p173:tracksInfo xmlns:p173="http://schemas.microsoft.com/office/powerpoint/2017/3/main" displayLoc="slide">
                         <p173:trackLst>
-                          <p173:track id="{636414A8-CBDC-4F8F-8210-6C7EB2A4F48F}" label="English (captions)" lang="en-US" r:embed="rId7"/>
+                          <p173:track id="{AEF2CE48-C80B-4C0E-8321-0A3CC0B7213B}" label="English (captions)" lang="en-US" r:embed="rId7"/>
                         </p173:trackLst>
                       </p173:tracksInfo>
                     </p:ext>
@@ -12257,10 +12257,10 @@
   </p:clrMapOvr>
   <mc:AlternateContent xmlns:mc="http://schemas.openxmlformats.org/markup-compatibility/2006">
     <mc:Choice xmlns:p14="http://schemas.microsoft.com/office/powerpoint/2010/main" Requires="p14">
-      <p:transition spd="slow" p14:dur="2000" advTm="72090"/>
+      <p:transition spd="slow" p14:dur="2000" advTm="58310"/>
     </mc:Choice>
     <mc:Fallback>
-      <p:transition spd="slow" advTm="72090"/>
+      <p:transition spd="slow" advTm="58310"/>
     </mc:Fallback>
   </mc:AlternateContent>
   <p:timing>
@@ -12294,7 +12294,7 @@
                                   <p:childTnLst>
                                     <p:cmd type="call" cmd="playFrom(0.0)">
                                       <p:cBhvr>
-                                        <p:cTn id="6" dur="71088" fill="hold"/>
+                                        <p:cTn id="6" dur="54312" fill="hold"/>
                                         <p:tgtEl>
                                           <p:spTgt spid="26"/>
                                         </p:tgtEl>
@@ -14586,7 +14586,7 @@
             <a:hlinkClick r:id="" action="ppaction://media"/>
             <a:extLst>
               <a:ext uri="{FF2B5EF4-FFF2-40B4-BE49-F238E27FC236}">
-                <a16:creationId xmlns:a16="http://schemas.microsoft.com/office/drawing/2014/main" id="{6CC93BAB-4153-F497-360D-C8DC22DFFF80}"/>
+                <a16:creationId xmlns:a16="http://schemas.microsoft.com/office/drawing/2014/main" id="{D60C518D-B4E6-5DCB-7533-AAD75841CFD9}"/>
               </a:ext>
             </a:extLst>
           </p:cNvPr>
@@ -14602,7 +14602,7 @@
                     <p:ext uri="{3AFAAA56-56D3-431D-BCD4-E75A35582382}">
                       <p173:tracksInfo xmlns:p173="http://schemas.microsoft.com/office/powerpoint/2017/3/main" displayLoc="slide">
                         <p173:trackLst>
-                          <p173:track id="{071DA945-5473-4F14-B437-D49FD7585CD2}" label="English (captions)" lang="en-US" r:embed="rId8"/>
+                          <p173:track id="{414BF48F-4C44-49BD-AE00-F9D16CD733D1}" label="English (captions)" lang="en-US" r:embed="rId8"/>
                         </p173:trackLst>
                       </p173:tracksInfo>
                     </p:ext>
@@ -14635,10 +14635,10 @@
   </p:clrMapOvr>
   <mc:AlternateContent xmlns:mc="http://schemas.openxmlformats.org/markup-compatibility/2006">
     <mc:Choice xmlns:p14="http://schemas.microsoft.com/office/powerpoint/2010/main" Requires="p14">
-      <p:transition spd="slow" p14:dur="2000" advTm="70940"/>
+      <p:transition spd="slow" p14:dur="2000" advTm="57780"/>
     </mc:Choice>
     <mc:Fallback>
-      <p:transition spd="slow" advTm="70940"/>
+      <p:transition spd="slow" advTm="57780"/>
     </mc:Fallback>
   </mc:AlternateContent>
   <p:timing>
@@ -14672,7 +14672,7 @@
                                   <p:childTnLst>
                                     <p:cmd type="call" cmd="playFrom(0.0)">
                                       <p:cBhvr>
-                                        <p:cTn id="6" dur="69936" fill="hold"/>
+                                        <p:cTn id="6" dur="53784" fill="hold"/>
                                         <p:tgtEl>
                                           <p:spTgt spid="15"/>
                                         </p:tgtEl>

--- a/presentations/b05-devices/B05_Devices_Narrated.pptx
+++ b/presentations/b05-devices/B05_Devices_Narrated.pptx
@@ -181,7 +181,7 @@
     </p:spTree>
     <p:extLst>
       <p:ext uri="{BB962C8B-B14F-4D97-AF65-F5344CB8AC3E}">
-        <p14:creationId xmlns:p14="http://schemas.microsoft.com/office/powerpoint/2010/main" val="1571423928"/>
+        <p14:creationId xmlns:p14="http://schemas.microsoft.com/office/powerpoint/2010/main" val="2978181153"/>
       </p:ext>
     </p:extLst>
   </p:cSld>
@@ -2250,7 +2250,7 @@
             <a:hlinkClick r:id="" action="ppaction://media"/>
             <a:extLst>
               <a:ext uri="{FF2B5EF4-FFF2-40B4-BE49-F238E27FC236}">
-                <a16:creationId xmlns:a16="http://schemas.microsoft.com/office/drawing/2014/main" id="{5956021A-D2F8-613B-5C0F-22B5C32EF0DE}"/>
+                <a16:creationId xmlns:a16="http://schemas.microsoft.com/office/drawing/2014/main" id="{837B6611-BA69-3890-D332-493E43615E21}"/>
               </a:ext>
             </a:extLst>
           </p:cNvPr>
@@ -2266,7 +2266,7 @@
                     <p:ext uri="{3AFAAA56-56D3-431D-BCD4-E75A35582382}">
                       <p173:tracksInfo xmlns:p173="http://schemas.microsoft.com/office/powerpoint/2017/3/main" displayLoc="slide">
                         <p173:trackLst>
-                          <p173:track id="{8747EF83-EE58-4614-8DB5-05C1B1C0C864}" label="English (captions)" lang="en-US" r:embed="rId6"/>
+                          <p173:track id="{AD17A80B-BC2E-4472-B64B-B0A2986F796B}" label="English (captions)" lang="en-US" r:embed="rId6"/>
                         </p173:trackLst>
                       </p173:tracksInfo>
                     </p:ext>
@@ -2284,7 +2284,7 @@
         </p:blipFill>
         <p:spPr>
           <a:xfrm>
-            <a:off x="127000" y="6350000"/>
+            <a:off x="12446000" y="127000"/>
             <a:ext cx="304800" cy="304800"/>
           </a:xfrm>
           <a:prstGeom prst="rect">
@@ -3256,7 +3256,7 @@
             <a:hlinkClick r:id="" action="ppaction://media"/>
             <a:extLst>
               <a:ext uri="{FF2B5EF4-FFF2-40B4-BE49-F238E27FC236}">
-                <a16:creationId xmlns:a16="http://schemas.microsoft.com/office/drawing/2014/main" id="{598EB3F2-A911-EB8B-9199-3B412059B0FB}"/>
+                <a16:creationId xmlns:a16="http://schemas.microsoft.com/office/drawing/2014/main" id="{C462A608-CC77-DD1A-70B3-4B2A6A789D9C}"/>
               </a:ext>
             </a:extLst>
           </p:cNvPr>
@@ -3272,7 +3272,7 @@
                     <p:ext uri="{3AFAAA56-56D3-431D-BCD4-E75A35582382}">
                       <p173:tracksInfo xmlns:p173="http://schemas.microsoft.com/office/powerpoint/2017/3/main" displayLoc="slide">
                         <p173:trackLst>
-                          <p173:track id="{555E0E26-D50F-4A85-874D-0AFDD36582F9}" label="English (captions)" lang="en-US" r:embed="rId10"/>
+                          <p173:track id="{6C962E73-F5B2-4784-9D62-D9452DAF7B93}" label="English (captions)" lang="en-US" r:embed="rId10"/>
                         </p173:trackLst>
                       </p173:tracksInfo>
                     </p:ext>
@@ -3290,7 +3290,7 @@
         </p:blipFill>
         <p:spPr>
           <a:xfrm>
-            <a:off x="127000" y="6350000"/>
+            <a:off x="12446000" y="127000"/>
             <a:ext cx="304800" cy="304800"/>
           </a:xfrm>
           <a:prstGeom prst="rect">
@@ -4089,7 +4089,7 @@
             <a:hlinkClick r:id="" action="ppaction://media"/>
             <a:extLst>
               <a:ext uri="{FF2B5EF4-FFF2-40B4-BE49-F238E27FC236}">
-                <a16:creationId xmlns:a16="http://schemas.microsoft.com/office/drawing/2014/main" id="{5C241971-EBD2-BF5B-E1F5-08B0A2874D36}"/>
+                <a16:creationId xmlns:a16="http://schemas.microsoft.com/office/drawing/2014/main" id="{0B459A66-D382-B140-18E7-8EA7B05517C1}"/>
               </a:ext>
             </a:extLst>
           </p:cNvPr>
@@ -4105,7 +4105,7 @@
                     <p:ext uri="{3AFAAA56-56D3-431D-BCD4-E75A35582382}">
                       <p173:tracksInfo xmlns:p173="http://schemas.microsoft.com/office/powerpoint/2017/3/main" displayLoc="slide">
                         <p173:trackLst>
-                          <p173:track id="{2F47293D-01AF-4773-8476-C545C2756971}" label="English (captions)" lang="en-US" r:embed="rId8"/>
+                          <p173:track id="{8A73A62F-96EA-4FA9-A0E8-B4AD1023A2BD}" label="English (captions)" lang="en-US" r:embed="rId8"/>
                         </p173:trackLst>
                       </p173:tracksInfo>
                     </p:ext>
@@ -4123,7 +4123,7 @@
         </p:blipFill>
         <p:spPr>
           <a:xfrm>
-            <a:off x="127000" y="6350000"/>
+            <a:off x="12446000" y="127000"/>
             <a:ext cx="304800" cy="304800"/>
           </a:xfrm>
           <a:prstGeom prst="rect">
@@ -5280,7 +5280,7 @@
             <a:hlinkClick r:id="" action="ppaction://media"/>
             <a:extLst>
               <a:ext uri="{FF2B5EF4-FFF2-40B4-BE49-F238E27FC236}">
-                <a16:creationId xmlns:a16="http://schemas.microsoft.com/office/drawing/2014/main" id="{47C95284-ABE7-C4D8-D3BE-B8A774966FAB}"/>
+                <a16:creationId xmlns:a16="http://schemas.microsoft.com/office/drawing/2014/main" id="{94170CD0-93F1-6B5D-62C6-F3BF371F617E}"/>
               </a:ext>
             </a:extLst>
           </p:cNvPr>
@@ -5296,7 +5296,7 @@
                     <p:ext uri="{3AFAAA56-56D3-431D-BCD4-E75A35582382}">
                       <p173:tracksInfo xmlns:p173="http://schemas.microsoft.com/office/powerpoint/2017/3/main" displayLoc="slide">
                         <p173:trackLst>
-                          <p173:track id="{7AFAC944-2448-48F6-966B-A4E0A7186A8D}" label="English (captions)" lang="en-US" r:embed="rId8"/>
+                          <p173:track id="{F69EEDD2-B4AD-4979-8F7B-CE00E6117995}" label="English (captions)" lang="en-US" r:embed="rId8"/>
                         </p173:trackLst>
                       </p173:tracksInfo>
                     </p:ext>
@@ -5314,7 +5314,7 @@
         </p:blipFill>
         <p:spPr>
           <a:xfrm>
-            <a:off x="127000" y="6350000"/>
+            <a:off x="12446000" y="127000"/>
             <a:ext cx="304800" cy="304800"/>
           </a:xfrm>
           <a:prstGeom prst="rect">
@@ -6597,7 +6597,7 @@
             <a:hlinkClick r:id="" action="ppaction://media"/>
             <a:extLst>
               <a:ext uri="{FF2B5EF4-FFF2-40B4-BE49-F238E27FC236}">
-                <a16:creationId xmlns:a16="http://schemas.microsoft.com/office/drawing/2014/main" id="{353E31C1-0829-995C-8475-DEC01F776CA9}"/>
+                <a16:creationId xmlns:a16="http://schemas.microsoft.com/office/drawing/2014/main" id="{5F9C9ED1-11E5-B612-474E-D7AC3AF71088}"/>
               </a:ext>
             </a:extLst>
           </p:cNvPr>
@@ -6613,7 +6613,7 @@
                     <p:ext uri="{3AFAAA56-56D3-431D-BCD4-E75A35582382}">
                       <p173:tracksInfo xmlns:p173="http://schemas.microsoft.com/office/powerpoint/2017/3/main" displayLoc="slide">
                         <p173:trackLst>
-                          <p173:track id="{A266FBE1-92BF-477E-B214-4205A51DF911}" label="English (captions)" lang="en-US" r:embed="rId8"/>
+                          <p173:track id="{A4C6FEA9-581B-491C-BB25-E6E5121EEF17}" label="English (captions)" lang="en-US" r:embed="rId8"/>
                         </p173:trackLst>
                       </p173:tracksInfo>
                     </p:ext>
@@ -6631,7 +6631,7 @@
         </p:blipFill>
         <p:spPr>
           <a:xfrm>
-            <a:off x="127000" y="6350000"/>
+            <a:off x="12446000" y="127000"/>
             <a:ext cx="304800" cy="304800"/>
           </a:xfrm>
           <a:prstGeom prst="rect">
@@ -7728,7 +7728,7 @@
             <a:hlinkClick r:id="" action="ppaction://media"/>
             <a:extLst>
               <a:ext uri="{FF2B5EF4-FFF2-40B4-BE49-F238E27FC236}">
-                <a16:creationId xmlns:a16="http://schemas.microsoft.com/office/drawing/2014/main" id="{7B961008-B174-BB25-A8EC-632D7286D1E1}"/>
+                <a16:creationId xmlns:a16="http://schemas.microsoft.com/office/drawing/2014/main" id="{837E6B10-EB2A-2452-19F1-70CC3DA5478A}"/>
               </a:ext>
             </a:extLst>
           </p:cNvPr>
@@ -7744,7 +7744,7 @@
                     <p:ext uri="{3AFAAA56-56D3-431D-BCD4-E75A35582382}">
                       <p173:tracksInfo xmlns:p173="http://schemas.microsoft.com/office/powerpoint/2017/3/main" displayLoc="slide">
                         <p173:trackLst>
-                          <p173:track id="{BC2404AA-80D7-4076-8C45-D72FFC82E87A}" label="English (captions)" lang="en-US" r:embed="rId10"/>
+                          <p173:track id="{229C6AFF-FFC5-4574-8E22-0ECD09607B30}" label="English (captions)" lang="en-US" r:embed="rId10"/>
                         </p173:trackLst>
                       </p173:tracksInfo>
                     </p:ext>
@@ -7762,7 +7762,7 @@
         </p:blipFill>
         <p:spPr>
           <a:xfrm>
-            <a:off x="127000" y="6350000"/>
+            <a:off x="12446000" y="127000"/>
             <a:ext cx="304800" cy="304800"/>
           </a:xfrm>
           <a:prstGeom prst="rect">
@@ -8811,7 +8811,7 @@
             <a:hlinkClick r:id="" action="ppaction://media"/>
             <a:extLst>
               <a:ext uri="{FF2B5EF4-FFF2-40B4-BE49-F238E27FC236}">
-                <a16:creationId xmlns:a16="http://schemas.microsoft.com/office/drawing/2014/main" id="{B585996E-C7B4-D3DA-F94D-D648592EFBA5}"/>
+                <a16:creationId xmlns:a16="http://schemas.microsoft.com/office/drawing/2014/main" id="{54E7C664-6527-FA79-20F5-3F68995B709F}"/>
               </a:ext>
             </a:extLst>
           </p:cNvPr>
@@ -8827,7 +8827,7 @@
                     <p:ext uri="{3AFAAA56-56D3-431D-BCD4-E75A35582382}">
                       <p173:tracksInfo xmlns:p173="http://schemas.microsoft.com/office/powerpoint/2017/3/main" displayLoc="slide">
                         <p173:trackLst>
-                          <p173:track id="{18CEA464-E7FD-4792-B640-C7F716D02530}" label="English (captions)" lang="en-US" r:embed="rId8"/>
+                          <p173:track id="{EBD6BE8B-4523-4864-A0A5-1BB1797248C1}" label="English (captions)" lang="en-US" r:embed="rId8"/>
                         </p173:trackLst>
                       </p173:tracksInfo>
                     </p:ext>
@@ -8845,7 +8845,7 @@
         </p:blipFill>
         <p:spPr>
           <a:xfrm>
-            <a:off x="127000" y="6350000"/>
+            <a:off x="12446000" y="127000"/>
             <a:ext cx="304800" cy="304800"/>
           </a:xfrm>
           <a:prstGeom prst="rect">
@@ -9697,7 +9697,7 @@
             <a:hlinkClick r:id="" action="ppaction://media"/>
             <a:extLst>
               <a:ext uri="{FF2B5EF4-FFF2-40B4-BE49-F238E27FC236}">
-                <a16:creationId xmlns:a16="http://schemas.microsoft.com/office/drawing/2014/main" id="{1291F08E-CEBF-5D0D-C233-432850EEBA55}"/>
+                <a16:creationId xmlns:a16="http://schemas.microsoft.com/office/drawing/2014/main" id="{7EE09F09-2FCD-AD50-ABAF-8AF2B877588E}"/>
               </a:ext>
             </a:extLst>
           </p:cNvPr>
@@ -9713,7 +9713,7 @@
                     <p:ext uri="{3AFAAA56-56D3-431D-BCD4-E75A35582382}">
                       <p173:tracksInfo xmlns:p173="http://schemas.microsoft.com/office/powerpoint/2017/3/main" displayLoc="slide">
                         <p173:trackLst>
-                          <p173:track id="{5C7E510E-92F4-4933-83E0-8D7BEBB4BE2E}" label="English (captions)" lang="en-US" r:embed="rId7"/>
+                          <p173:track id="{48541E0D-66FF-4456-92B9-437519B7D7CF}" label="English (captions)" lang="en-US" r:embed="rId7"/>
                         </p173:trackLst>
                       </p173:tracksInfo>
                     </p:ext>
@@ -9731,7 +9731,7 @@
         </p:blipFill>
         <p:spPr>
           <a:xfrm>
-            <a:off x="127000" y="6350000"/>
+            <a:off x="12446000" y="127000"/>
             <a:ext cx="304800" cy="304800"/>
           </a:xfrm>
           <a:prstGeom prst="rect">
@@ -10976,7 +10976,7 @@
             <a:hlinkClick r:id="" action="ppaction://media"/>
             <a:extLst>
               <a:ext uri="{FF2B5EF4-FFF2-40B4-BE49-F238E27FC236}">
-                <a16:creationId xmlns:a16="http://schemas.microsoft.com/office/drawing/2014/main" id="{5D6CCD28-0EEC-9BBF-42BD-4EE04894EFD0}"/>
+                <a16:creationId xmlns:a16="http://schemas.microsoft.com/office/drawing/2014/main" id="{2F054942-F359-F7DE-B059-E2505D51709C}"/>
               </a:ext>
             </a:extLst>
           </p:cNvPr>
@@ -10992,7 +10992,7 @@
                     <p:ext uri="{3AFAAA56-56D3-431D-BCD4-E75A35582382}">
                       <p173:tracksInfo xmlns:p173="http://schemas.microsoft.com/office/powerpoint/2017/3/main" displayLoc="slide">
                         <p173:trackLst>
-                          <p173:track id="{222C1BA0-C605-419C-A5B2-7AA866387580}" label="English (captions)" lang="en-US" r:embed="rId10"/>
+                          <p173:track id="{F923DF1D-F2B0-46A2-8F6D-1ECCF9CBAAD3}" label="English (captions)" lang="en-US" r:embed="rId10"/>
                         </p173:trackLst>
                       </p173:tracksInfo>
                     </p:ext>
@@ -11010,7 +11010,7 @@
         </p:blipFill>
         <p:spPr>
           <a:xfrm>
-            <a:off x="127000" y="6350000"/>
+            <a:off x="12446000" y="127000"/>
             <a:ext cx="304800" cy="304800"/>
           </a:xfrm>
           <a:prstGeom prst="rect">
@@ -12208,7 +12208,7 @@
             <a:hlinkClick r:id="" action="ppaction://media"/>
             <a:extLst>
               <a:ext uri="{FF2B5EF4-FFF2-40B4-BE49-F238E27FC236}">
-                <a16:creationId xmlns:a16="http://schemas.microsoft.com/office/drawing/2014/main" id="{92D9F01C-CA7E-921E-95A0-EB5969AA53E4}"/>
+                <a16:creationId xmlns:a16="http://schemas.microsoft.com/office/drawing/2014/main" id="{56B13435-C634-F3F0-61AB-3736CFC16C05}"/>
               </a:ext>
             </a:extLst>
           </p:cNvPr>
@@ -12224,7 +12224,7 @@
                     <p:ext uri="{3AFAAA56-56D3-431D-BCD4-E75A35582382}">
                       <p173:tracksInfo xmlns:p173="http://schemas.microsoft.com/office/powerpoint/2017/3/main" displayLoc="slide">
                         <p173:trackLst>
-                          <p173:track id="{AEF2CE48-C80B-4C0E-8321-0A3CC0B7213B}" label="English (captions)" lang="en-US" r:embed="rId7"/>
+                          <p173:track id="{C9A4E6AF-11EE-4858-A8BE-6263ADC4FD55}" label="English (captions)" lang="en-US" r:embed="rId7"/>
                         </p173:trackLst>
                       </p173:tracksInfo>
                     </p:ext>
@@ -12242,7 +12242,7 @@
         </p:blipFill>
         <p:spPr>
           <a:xfrm>
-            <a:off x="127000" y="6350000"/>
+            <a:off x="12446000" y="127000"/>
             <a:ext cx="304800" cy="304800"/>
           </a:xfrm>
           <a:prstGeom prst="rect">
@@ -14586,7 +14586,7 @@
             <a:hlinkClick r:id="" action="ppaction://media"/>
             <a:extLst>
               <a:ext uri="{FF2B5EF4-FFF2-40B4-BE49-F238E27FC236}">
-                <a16:creationId xmlns:a16="http://schemas.microsoft.com/office/drawing/2014/main" id="{D60C518D-B4E6-5DCB-7533-AAD75841CFD9}"/>
+                <a16:creationId xmlns:a16="http://schemas.microsoft.com/office/drawing/2014/main" id="{9818F3B2-308A-7520-6003-DB8F7F987D92}"/>
               </a:ext>
             </a:extLst>
           </p:cNvPr>
@@ -14602,7 +14602,7 @@
                     <p:ext uri="{3AFAAA56-56D3-431D-BCD4-E75A35582382}">
                       <p173:tracksInfo xmlns:p173="http://schemas.microsoft.com/office/powerpoint/2017/3/main" displayLoc="slide">
                         <p173:trackLst>
-                          <p173:track id="{414BF48F-4C44-49BD-AE00-F9D16CD733D1}" label="English (captions)" lang="en-US" r:embed="rId8"/>
+                          <p173:track id="{6CA4AD52-C1E0-481D-B43E-2E881F7F6046}" label="English (captions)" lang="en-US" r:embed="rId8"/>
                         </p173:trackLst>
                       </p173:tracksInfo>
                     </p:ext>
@@ -14620,7 +14620,7 @@
         </p:blipFill>
         <p:spPr>
           <a:xfrm>
-            <a:off x="127000" y="6350000"/>
+            <a:off x="12446000" y="127000"/>
             <a:ext cx="304800" cy="304800"/>
           </a:xfrm>
           <a:prstGeom prst="rect">
